--- a/public/lessons/year-6-maths/spring/week-13/multiply-mixed-numbers/teaching-powerpoint-v1.pptx
+++ b/public/lessons/year-6-maths/spring/week-13/multiply-mixed-numbers/teaching-powerpoint-v1.pptx
@@ -2,24 +2,24 @@
 <file path=ppt/presentation.xml><?xml version="1.0" encoding="utf-8"?>
 <p:presentation xmlns:p="http://schemas.openxmlformats.org/presentationml/2006/main">
   <p:sldMasterIdLst>
-    <p:sldMasterId xmlns:r="http://schemas.openxmlformats.org/officeDocument/2006/relationships" id="2147483648" r:id="Rf1959d1c25904026"/>
+    <p:sldMasterId xmlns:r="http://schemas.openxmlformats.org/officeDocument/2006/relationships" id="2147483648" r:id="R4e4f9521b54d47f6"/>
   </p:sldMasterIdLst>
   <p:notesMasterIdLst>
-    <p:notesMasterId xmlns:r="http://schemas.openxmlformats.org/officeDocument/2006/relationships" r:id="Rb67a597425084eef"/>
+    <p:notesMasterId xmlns:r="http://schemas.openxmlformats.org/officeDocument/2006/relationships" r:id="R9545947dc4f2459d"/>
   </p:notesMasterIdLst>
   <p:sldIdLst>
-    <p:sldId xmlns:r="http://schemas.openxmlformats.org/officeDocument/2006/relationships" id="256" r:id="Ra9a3e70d52724d7b"/>
-    <p:sldId xmlns:r="http://schemas.openxmlformats.org/officeDocument/2006/relationships" id="257" r:id="R2f2a0f2be687478e"/>
-    <p:sldId xmlns:r="http://schemas.openxmlformats.org/officeDocument/2006/relationships" id="258" r:id="R5290b93540e840b5"/>
-    <p:sldId xmlns:r="http://schemas.openxmlformats.org/officeDocument/2006/relationships" id="259" r:id="R69eb3eff637b4f48"/>
-    <p:sldId xmlns:r="http://schemas.openxmlformats.org/officeDocument/2006/relationships" id="260" r:id="R870dc5f9229a4dfa"/>
-    <p:sldId xmlns:r="http://schemas.openxmlformats.org/officeDocument/2006/relationships" id="261" r:id="R66394143b8934ecd"/>
-    <p:sldId xmlns:r="http://schemas.openxmlformats.org/officeDocument/2006/relationships" id="262" r:id="R38055d651a86448a"/>
-    <p:sldId xmlns:r="http://schemas.openxmlformats.org/officeDocument/2006/relationships" id="263" r:id="Rcf2c4ff6ae5f4fff"/>
-    <p:sldId xmlns:r="http://schemas.openxmlformats.org/officeDocument/2006/relationships" id="264" r:id="R2019cf16f95e4bd6"/>
-    <p:sldId xmlns:r="http://schemas.openxmlformats.org/officeDocument/2006/relationships" id="265" r:id="Ra81d75a1efbd49a0"/>
-    <p:sldId xmlns:r="http://schemas.openxmlformats.org/officeDocument/2006/relationships" id="266" r:id="R7ff0b7f363994551"/>
-    <p:sldId xmlns:r="http://schemas.openxmlformats.org/officeDocument/2006/relationships" id="267" r:id="R60f5be0bdad949f8"/>
+    <p:sldId xmlns:r="http://schemas.openxmlformats.org/officeDocument/2006/relationships" id="256" r:id="Ra39756d57a214a39"/>
+    <p:sldId xmlns:r="http://schemas.openxmlformats.org/officeDocument/2006/relationships" id="257" r:id="R32243047c5434319"/>
+    <p:sldId xmlns:r="http://schemas.openxmlformats.org/officeDocument/2006/relationships" id="258" r:id="R4eac873ee4c34769"/>
+    <p:sldId xmlns:r="http://schemas.openxmlformats.org/officeDocument/2006/relationships" id="259" r:id="Rc66f7e29012b4ad2"/>
+    <p:sldId xmlns:r="http://schemas.openxmlformats.org/officeDocument/2006/relationships" id="260" r:id="R2486ecc250184e05"/>
+    <p:sldId xmlns:r="http://schemas.openxmlformats.org/officeDocument/2006/relationships" id="261" r:id="R8dcc26fcf8b04583"/>
+    <p:sldId xmlns:r="http://schemas.openxmlformats.org/officeDocument/2006/relationships" id="262" r:id="R0a3e64ac96134dd6"/>
+    <p:sldId xmlns:r="http://schemas.openxmlformats.org/officeDocument/2006/relationships" id="263" r:id="R686d110a1fff4bfe"/>
+    <p:sldId xmlns:r="http://schemas.openxmlformats.org/officeDocument/2006/relationships" id="264" r:id="R2eb122fc5b5d4d69"/>
+    <p:sldId xmlns:r="http://schemas.openxmlformats.org/officeDocument/2006/relationships" id="265" r:id="Ra12fe29da11f4b32"/>
+    <p:sldId xmlns:r="http://schemas.openxmlformats.org/officeDocument/2006/relationships" id="266" r:id="Ref7cf9435ba64a08"/>
+    <p:sldId xmlns:r="http://schemas.openxmlformats.org/officeDocument/2006/relationships" id="267" r:id="R885e81ba2a374dde"/>
   </p:sldIdLst>
   <p:sldSz cx="12192000" cy="6858000"/>
   <p:notesSz cx="6858000" cy="9144000"/>
@@ -873,7 +873,7 @@
           <a:lstStyle xmlns:a="http://schemas.openxmlformats.org/drawingml/2006/main"/>
           <a:p xmlns:a="http://schemas.openxmlformats.org/drawingml/2006/main">
             <a:r>
-              <a:t>I do. Reveal the question, setup and each calculation stage one click at a time. Pupils watch before copying. Model answer: 1 7/8.</a:t>
+              <a:t>I do. Reveal the question, then reveal each mathematical change one click at a time. Point to the numbers and operation that changed before moving to the next line. Final answer: 1 7/8.</a:t>
             </a:r>
           </a:p>
         </p:txBody>
@@ -1291,7 +1291,7 @@
   </p:cSld>
   <p:clrMap bg1="lt1" tx1="dk1" bg2="lt2" tx2="dk2" accent1="accent1" accent2="accent2" accent3="accent3" accent4="accent4" accent5="accent5" accent6="accent6" hlink="hlink" folHlink="folHlink"/>
   <p:sldLayoutIdLst>
-    <p:sldLayoutId xmlns:r="http://schemas.openxmlformats.org/officeDocument/2006/relationships" id="2147483649" r:id="Rbfdc325f808c40c0"/>
+    <p:sldLayoutId xmlns:r="http://schemas.openxmlformats.org/officeDocument/2006/relationships" id="2147483649" r:id="R424c0654459e48ff"/>
   </p:sldLayoutIdLst>
   <p:txStyles>
     <p:titleStyle>
@@ -1842,7 +1842,7 @@
           <p:cNvPr id="12" name="">
             <a:extLst xmlns:a="http://schemas.openxmlformats.org/drawingml/2006/main">
               <a:ext uri="{FF2B5EF4-FFF2-40B4-BE49-F238E27FC236}">
-                <a16:creationId xmlns:a16="http://schemas.microsoft.com/office/drawing/2014/main" id="{12A45822-F70E-49B6-AE94-204F582D197B}"/>
+                <a16:creationId xmlns:a16="http://schemas.microsoft.com/office/drawing/2014/main" id="{FB68BB57-3350-43EC-92D2-041E7C115568}"/>
               </a:ext>
             </a:extLst>
           </p:cNvPr>
@@ -1874,7 +1874,7 @@
           <p:cNvPr id="2" name="">
             <a:extLst xmlns:a="http://schemas.openxmlformats.org/drawingml/2006/main">
               <a:ext uri="{FF2B5EF4-FFF2-40B4-BE49-F238E27FC236}">
-                <a16:creationId xmlns:a16="http://schemas.microsoft.com/office/drawing/2014/main" id="{0F151F63-7E28-4336-9E6B-848879FF37AF}"/>
+                <a16:creationId xmlns:a16="http://schemas.microsoft.com/office/drawing/2014/main" id="{6469141C-E1E8-430E-86CA-66CA54F474CA}"/>
               </a:ext>
             </a:extLst>
           </p:cNvPr>
@@ -1931,7 +1931,7 @@
           <p:cNvPr id="3" name="">
             <a:extLst xmlns:a="http://schemas.openxmlformats.org/drawingml/2006/main">
               <a:ext uri="{FF2B5EF4-FFF2-40B4-BE49-F238E27FC236}">
-                <a16:creationId xmlns:a16="http://schemas.microsoft.com/office/drawing/2014/main" id="{3D7DAB45-182B-4BD5-BC3B-8DF1FD23B0EE}"/>
+                <a16:creationId xmlns:a16="http://schemas.microsoft.com/office/drawing/2014/main" id="{9CD1121E-AC84-47AE-B088-F1C1C7008AAC}"/>
               </a:ext>
             </a:extLst>
           </p:cNvPr>
@@ -1965,7 +1965,7 @@
           <p:cNvPr id="4" name="">
             <a:extLst xmlns:a="http://schemas.openxmlformats.org/drawingml/2006/main">
               <a:ext uri="{FF2B5EF4-FFF2-40B4-BE49-F238E27FC236}">
-                <a16:creationId xmlns:a16="http://schemas.microsoft.com/office/drawing/2014/main" id="{8EB601D6-837B-4701-80CD-69CBAC6AF1E0}"/>
+                <a16:creationId xmlns:a16="http://schemas.microsoft.com/office/drawing/2014/main" id="{8ADEFFD7-9047-4744-B2CA-E55894AB72C0}"/>
               </a:ext>
             </a:extLst>
           </p:cNvPr>
@@ -2022,7 +2022,7 @@
           <p:cNvPr id="5" name="">
             <a:extLst xmlns:a="http://schemas.openxmlformats.org/drawingml/2006/main">
               <a:ext uri="{FF2B5EF4-FFF2-40B4-BE49-F238E27FC236}">
-                <a16:creationId xmlns:a16="http://schemas.microsoft.com/office/drawing/2014/main" id="{741FE5B7-6960-4055-A882-68C4BC9A7484}"/>
+                <a16:creationId xmlns:a16="http://schemas.microsoft.com/office/drawing/2014/main" id="{CA38D3E6-4518-4A36-BA7F-B5C0C766C78C}"/>
               </a:ext>
             </a:extLst>
           </p:cNvPr>
@@ -2079,7 +2079,7 @@
           <p:cNvPr id="6" name="">
             <a:extLst xmlns:a="http://schemas.openxmlformats.org/drawingml/2006/main">
               <a:ext uri="{FF2B5EF4-FFF2-40B4-BE49-F238E27FC236}">
-                <a16:creationId xmlns:a16="http://schemas.microsoft.com/office/drawing/2014/main" id="{F5099F7B-6F59-4CE4-A8A3-4D0B975A4251}"/>
+                <a16:creationId xmlns:a16="http://schemas.microsoft.com/office/drawing/2014/main" id="{2785E20C-0A76-4864-B298-934DBACC3F83}"/>
               </a:ext>
             </a:extLst>
           </p:cNvPr>
@@ -2113,7 +2113,7 @@
           <p:cNvPr id="7" name="">
             <a:extLst xmlns:a="http://schemas.openxmlformats.org/drawingml/2006/main">
               <a:ext uri="{FF2B5EF4-FFF2-40B4-BE49-F238E27FC236}">
-                <a16:creationId xmlns:a16="http://schemas.microsoft.com/office/drawing/2014/main" id="{72EA9C1F-05F9-4DE0-8AA7-8E876DFEEA9B}"/>
+                <a16:creationId xmlns:a16="http://schemas.microsoft.com/office/drawing/2014/main" id="{20394799-C7A8-4EE1-8CA6-83A4D5D2ED5B}"/>
               </a:ext>
             </a:extLst>
           </p:cNvPr>
@@ -2170,7 +2170,7 @@
           <p:cNvPr id="8" name="">
             <a:extLst xmlns:a="http://schemas.openxmlformats.org/drawingml/2006/main">
               <a:ext uri="{FF2B5EF4-FFF2-40B4-BE49-F238E27FC236}">
-                <a16:creationId xmlns:a16="http://schemas.microsoft.com/office/drawing/2014/main" id="{20C1E89E-531A-4972-BF5D-D82A99DE7920}"/>
+                <a16:creationId xmlns:a16="http://schemas.microsoft.com/office/drawing/2014/main" id="{A523FFB1-D49B-48A4-A696-4A3E314AF41C}"/>
               </a:ext>
             </a:extLst>
           </p:cNvPr>
@@ -2227,7 +2227,7 @@
           <p:cNvPr id="9" name="">
             <a:extLst xmlns:a="http://schemas.openxmlformats.org/drawingml/2006/main">
               <a:ext uri="{FF2B5EF4-FFF2-40B4-BE49-F238E27FC236}">
-                <a16:creationId xmlns:a16="http://schemas.microsoft.com/office/drawing/2014/main" id="{E3CA7E32-1210-4A68-A124-0C1EC284171F}"/>
+                <a16:creationId xmlns:a16="http://schemas.microsoft.com/office/drawing/2014/main" id="{E13AB14C-BB1D-44DA-B8CF-0B5D7EF10978}"/>
               </a:ext>
             </a:extLst>
           </p:cNvPr>
@@ -2284,7 +2284,7 @@
           <p:cNvPr id="10" name="">
             <a:extLst xmlns:a="http://schemas.openxmlformats.org/drawingml/2006/main">
               <a:ext uri="{FF2B5EF4-FFF2-40B4-BE49-F238E27FC236}">
-                <a16:creationId xmlns:a16="http://schemas.microsoft.com/office/drawing/2014/main" id="{E7442D03-9257-47B5-A1A8-DF93F8F9EC93}"/>
+                <a16:creationId xmlns:a16="http://schemas.microsoft.com/office/drawing/2014/main" id="{C553EE5C-0C8B-4E78-9E4C-0FABB129AB7B}"/>
               </a:ext>
             </a:extLst>
           </p:cNvPr>
@@ -2341,7 +2341,7 @@
           <p:cNvPr id="11" name="">
             <a:extLst xmlns:a="http://schemas.openxmlformats.org/drawingml/2006/main">
               <a:ext uri="{FF2B5EF4-FFF2-40B4-BE49-F238E27FC236}">
-                <a16:creationId xmlns:a16="http://schemas.microsoft.com/office/drawing/2014/main" id="{D5D61760-9A0A-4EB9-8CF7-22DDFF82A366}"/>
+                <a16:creationId xmlns:a16="http://schemas.microsoft.com/office/drawing/2014/main" id="{447925EB-54E7-4215-90B1-C7B1331619D1}"/>
               </a:ext>
             </a:extLst>
           </p:cNvPr>
@@ -2396,7 +2396,7 @@
     </p:spTree>
     <p:extLst>
       <p:ext uri="{BB962C8B-B14F-4D97-AF65-F5344CB8AC3E}">
-        <p14:creationId xmlns:p14="http://schemas.microsoft.com/office/powerpoint/2010/main" val="2115225007"/>
+        <p14:creationId xmlns:p14="http://schemas.microsoft.com/office/powerpoint/2010/main" val="946721685"/>
       </p:ext>
     </p:extLst>
   </p:cSld>
@@ -2427,7 +2427,7 @@
           <p:cNvPr id="14" name="">
             <a:extLst xmlns:a="http://schemas.openxmlformats.org/drawingml/2006/main">
               <a:ext uri="{FF2B5EF4-FFF2-40B4-BE49-F238E27FC236}">
-                <a16:creationId xmlns:a16="http://schemas.microsoft.com/office/drawing/2014/main" id="{50758FE7-D260-4649-A6B7-3E49B02B5503}"/>
+                <a16:creationId xmlns:a16="http://schemas.microsoft.com/office/drawing/2014/main" id="{252B230F-F60E-4526-B0CB-C60302098FEB}"/>
               </a:ext>
             </a:extLst>
           </p:cNvPr>
@@ -2459,7 +2459,7 @@
           <p:cNvPr id="2" name="">
             <a:extLst xmlns:a="http://schemas.openxmlformats.org/drawingml/2006/main">
               <a:ext uri="{FF2B5EF4-FFF2-40B4-BE49-F238E27FC236}">
-                <a16:creationId xmlns:a16="http://schemas.microsoft.com/office/drawing/2014/main" id="{27F230E3-D39B-4229-A7ED-874768503BAB}"/>
+                <a16:creationId xmlns:a16="http://schemas.microsoft.com/office/drawing/2014/main" id="{144395FA-CF16-4FAF-BE08-806DEBF61D97}"/>
               </a:ext>
             </a:extLst>
           </p:cNvPr>
@@ -2516,7 +2516,7 @@
           <p:cNvPr id="3" name="">
             <a:extLst xmlns:a="http://schemas.openxmlformats.org/drawingml/2006/main">
               <a:ext uri="{FF2B5EF4-FFF2-40B4-BE49-F238E27FC236}">
-                <a16:creationId xmlns:a16="http://schemas.microsoft.com/office/drawing/2014/main" id="{C8CDA5E4-F29C-4796-B879-522B2A48A459}"/>
+                <a16:creationId xmlns:a16="http://schemas.microsoft.com/office/drawing/2014/main" id="{419640E7-8DE4-4068-8426-7AA15971D1E1}"/>
               </a:ext>
             </a:extLst>
           </p:cNvPr>
@@ -2548,7 +2548,7 @@
           <p:cNvPr id="4" name="">
             <a:extLst xmlns:a="http://schemas.openxmlformats.org/drawingml/2006/main">
               <a:ext uri="{FF2B5EF4-FFF2-40B4-BE49-F238E27FC236}">
-                <a16:creationId xmlns:a16="http://schemas.microsoft.com/office/drawing/2014/main" id="{AF2EEE86-B032-44D7-B2FE-5E04C1EF60F7}"/>
+                <a16:creationId xmlns:a16="http://schemas.microsoft.com/office/drawing/2014/main" id="{59B891A0-23B8-4467-887D-9947A8DDFF39}"/>
               </a:ext>
             </a:extLst>
           </p:cNvPr>
@@ -2605,7 +2605,7 @@
           <p:cNvPr id="5" name="">
             <a:extLst xmlns:a="http://schemas.openxmlformats.org/drawingml/2006/main">
               <a:ext uri="{FF2B5EF4-FFF2-40B4-BE49-F238E27FC236}">
-                <a16:creationId xmlns:a16="http://schemas.microsoft.com/office/drawing/2014/main" id="{F6212A1E-BF62-47C1-A84D-11C55703E143}"/>
+                <a16:creationId xmlns:a16="http://schemas.microsoft.com/office/drawing/2014/main" id="{8E75126C-5963-48FC-A126-576C5A5B816C}"/>
               </a:ext>
             </a:extLst>
           </p:cNvPr>
@@ -2662,7 +2662,7 @@
           <p:cNvPr id="6" name="">
             <a:extLst xmlns:a="http://schemas.openxmlformats.org/drawingml/2006/main">
               <a:ext uri="{FF2B5EF4-FFF2-40B4-BE49-F238E27FC236}">
-                <a16:creationId xmlns:a16="http://schemas.microsoft.com/office/drawing/2014/main" id="{CAF0F4F9-5C59-48B4-BF61-D88FABE7A825}"/>
+                <a16:creationId xmlns:a16="http://schemas.microsoft.com/office/drawing/2014/main" id="{93B51753-BBE1-48FE-86A0-5EF79972D971}"/>
               </a:ext>
             </a:extLst>
           </p:cNvPr>
@@ -2719,7 +2719,7 @@
           <p:cNvPr id="7" name="">
             <a:extLst xmlns:a="http://schemas.openxmlformats.org/drawingml/2006/main">
               <a:ext uri="{FF2B5EF4-FFF2-40B4-BE49-F238E27FC236}">
-                <a16:creationId xmlns:a16="http://schemas.microsoft.com/office/drawing/2014/main" id="{BB3D6678-589A-4C09-A5A3-8B3DB5D99124}"/>
+                <a16:creationId xmlns:a16="http://schemas.microsoft.com/office/drawing/2014/main" id="{587F3CBE-624F-4BCC-93E4-CF7BD4994726}"/>
               </a:ext>
             </a:extLst>
           </p:cNvPr>
@@ -2751,7 +2751,7 @@
           <p:cNvPr id="8" name="">
             <a:extLst xmlns:a="http://schemas.openxmlformats.org/drawingml/2006/main">
               <a:ext uri="{FF2B5EF4-FFF2-40B4-BE49-F238E27FC236}">
-                <a16:creationId xmlns:a16="http://schemas.microsoft.com/office/drawing/2014/main" id="{5635AC1F-5EA7-465A-BCD7-F3AF80D6F10D}"/>
+                <a16:creationId xmlns:a16="http://schemas.microsoft.com/office/drawing/2014/main" id="{E0D64AEC-7EC9-4C55-BAB8-38B17FC3D373}"/>
               </a:ext>
             </a:extLst>
           </p:cNvPr>
@@ -2808,7 +2808,7 @@
           <p:cNvPr id="9" name="">
             <a:extLst xmlns:a="http://schemas.openxmlformats.org/drawingml/2006/main">
               <a:ext uri="{FF2B5EF4-FFF2-40B4-BE49-F238E27FC236}">
-                <a16:creationId xmlns:a16="http://schemas.microsoft.com/office/drawing/2014/main" id="{8936EC6B-5517-4948-B15A-7E2073780293}"/>
+                <a16:creationId xmlns:a16="http://schemas.microsoft.com/office/drawing/2014/main" id="{6B8AD2C4-AC39-46D2-B1FD-A850AA5BB16A}"/>
               </a:ext>
             </a:extLst>
           </p:cNvPr>
@@ -2865,7 +2865,7 @@
           <p:cNvPr id="10" name="">
             <a:extLst xmlns:a="http://schemas.openxmlformats.org/drawingml/2006/main">
               <a:ext uri="{FF2B5EF4-FFF2-40B4-BE49-F238E27FC236}">
-                <a16:creationId xmlns:a16="http://schemas.microsoft.com/office/drawing/2014/main" id="{97F77397-2EA8-4C5F-8C68-80468CA10AE9}"/>
+                <a16:creationId xmlns:a16="http://schemas.microsoft.com/office/drawing/2014/main" id="{A2CB20E1-2C4B-4466-AE98-8631B39B6F04}"/>
               </a:ext>
             </a:extLst>
           </p:cNvPr>
@@ -2922,7 +2922,7 @@
           <p:cNvPr id="11" name="">
             <a:extLst xmlns:a="http://schemas.openxmlformats.org/drawingml/2006/main">
               <a:ext uri="{FF2B5EF4-FFF2-40B4-BE49-F238E27FC236}">
-                <a16:creationId xmlns:a16="http://schemas.microsoft.com/office/drawing/2014/main" id="{F4BBC0F6-4893-4477-B4A3-6BD42D842936}"/>
+                <a16:creationId xmlns:a16="http://schemas.microsoft.com/office/drawing/2014/main" id="{D13A2627-4E8D-4390-8B77-5769DA92F99E}"/>
               </a:ext>
             </a:extLst>
           </p:cNvPr>
@@ -2979,7 +2979,7 @@
           <p:cNvPr id="12" name="">
             <a:extLst xmlns:a="http://schemas.openxmlformats.org/drawingml/2006/main">
               <a:ext uri="{FF2B5EF4-FFF2-40B4-BE49-F238E27FC236}">
-                <a16:creationId xmlns:a16="http://schemas.microsoft.com/office/drawing/2014/main" id="{36662589-7685-4099-B46A-468DDD35CBA0}"/>
+                <a16:creationId xmlns:a16="http://schemas.microsoft.com/office/drawing/2014/main" id="{96807B2B-078D-4668-A5A0-6BC2CEC044C3}"/>
               </a:ext>
             </a:extLst>
           </p:cNvPr>
@@ -3036,7 +3036,7 @@
           <p:cNvPr id="13" name="">
             <a:extLst xmlns:a="http://schemas.openxmlformats.org/drawingml/2006/main">
               <a:ext uri="{FF2B5EF4-FFF2-40B4-BE49-F238E27FC236}">
-                <a16:creationId xmlns:a16="http://schemas.microsoft.com/office/drawing/2014/main" id="{FB341DDB-792A-48E2-9BA4-C8772014C16E}"/>
+                <a16:creationId xmlns:a16="http://schemas.microsoft.com/office/drawing/2014/main" id="{2C786AA1-AC08-4646-9408-03CB42E57FCF}"/>
               </a:ext>
             </a:extLst>
           </p:cNvPr>
@@ -3091,7 +3091,7 @@
     </p:spTree>
     <p:extLst>
       <p:ext uri="{BB962C8B-B14F-4D97-AF65-F5344CB8AC3E}">
-        <p14:creationId xmlns:p14="http://schemas.microsoft.com/office/powerpoint/2010/main" val="1196629249"/>
+        <p14:creationId xmlns:p14="http://schemas.microsoft.com/office/powerpoint/2010/main" val="2096218933"/>
       </p:ext>
     </p:extLst>
   </p:cSld>
@@ -3292,7 +3292,7 @@
           <p:cNvPr id="19" name="">
             <a:extLst xmlns:a="http://schemas.openxmlformats.org/drawingml/2006/main">
               <a:ext uri="{FF2B5EF4-FFF2-40B4-BE49-F238E27FC236}">
-                <a16:creationId xmlns:a16="http://schemas.microsoft.com/office/drawing/2014/main" id="{287F5920-4730-454A-9088-6AD8BE9B4E5E}"/>
+                <a16:creationId xmlns:a16="http://schemas.microsoft.com/office/drawing/2014/main" id="{72AC2745-CE4D-4DE4-AF4C-E08935CFDF7F}"/>
               </a:ext>
             </a:extLst>
           </p:cNvPr>
@@ -3324,7 +3324,7 @@
           <p:cNvPr id="2" name="">
             <a:extLst xmlns:a="http://schemas.openxmlformats.org/drawingml/2006/main">
               <a:ext uri="{FF2B5EF4-FFF2-40B4-BE49-F238E27FC236}">
-                <a16:creationId xmlns:a16="http://schemas.microsoft.com/office/drawing/2014/main" id="{E54335BD-38EE-42D2-94C1-936ABBEA7875}"/>
+                <a16:creationId xmlns:a16="http://schemas.microsoft.com/office/drawing/2014/main" id="{9DF1FECE-8638-416F-A818-D2A150621D09}"/>
               </a:ext>
             </a:extLst>
           </p:cNvPr>
@@ -3381,7 +3381,7 @@
           <p:cNvPr id="3" name="">
             <a:extLst xmlns:a="http://schemas.openxmlformats.org/drawingml/2006/main">
               <a:ext uri="{FF2B5EF4-FFF2-40B4-BE49-F238E27FC236}">
-                <a16:creationId xmlns:a16="http://schemas.microsoft.com/office/drawing/2014/main" id="{FEFBB7B2-7B96-4BB1-B566-74F914320877}"/>
+                <a16:creationId xmlns:a16="http://schemas.microsoft.com/office/drawing/2014/main" id="{F74D7384-E0FD-4068-B5C0-694B583413D8}"/>
               </a:ext>
             </a:extLst>
           </p:cNvPr>
@@ -3413,7 +3413,7 @@
           <p:cNvPr id="4" name="">
             <a:extLst xmlns:a="http://schemas.openxmlformats.org/drawingml/2006/main">
               <a:ext uri="{FF2B5EF4-FFF2-40B4-BE49-F238E27FC236}">
-                <a16:creationId xmlns:a16="http://schemas.microsoft.com/office/drawing/2014/main" id="{84B9FD00-25B0-4A71-B6FF-7F8632ACF8BD}"/>
+                <a16:creationId xmlns:a16="http://schemas.microsoft.com/office/drawing/2014/main" id="{5FF3C4AE-4467-40F4-A193-8E8A44E1DCE5}"/>
               </a:ext>
             </a:extLst>
           </p:cNvPr>
@@ -3470,7 +3470,7 @@
           <p:cNvPr id="5" name="">
             <a:extLst xmlns:a="http://schemas.openxmlformats.org/drawingml/2006/main">
               <a:ext uri="{FF2B5EF4-FFF2-40B4-BE49-F238E27FC236}">
-                <a16:creationId xmlns:a16="http://schemas.microsoft.com/office/drawing/2014/main" id="{9D2F702F-DF0C-4781-9FF7-4A22C9F06C26}"/>
+                <a16:creationId xmlns:a16="http://schemas.microsoft.com/office/drawing/2014/main" id="{C287912C-573E-401E-9A2C-AA8DB29243F8}"/>
               </a:ext>
             </a:extLst>
           </p:cNvPr>
@@ -3527,7 +3527,7 @@
           <p:cNvPr id="6" name="">
             <a:extLst xmlns:a="http://schemas.openxmlformats.org/drawingml/2006/main">
               <a:ext uri="{FF2B5EF4-FFF2-40B4-BE49-F238E27FC236}">
-                <a16:creationId xmlns:a16="http://schemas.microsoft.com/office/drawing/2014/main" id="{657C7A09-520D-452F-81A4-27480AB4276A}"/>
+                <a16:creationId xmlns:a16="http://schemas.microsoft.com/office/drawing/2014/main" id="{0187B08C-0754-4908-B839-21FC6F88696B}"/>
               </a:ext>
             </a:extLst>
           </p:cNvPr>
@@ -3584,7 +3584,7 @@
           <p:cNvPr id="7" name="">
             <a:extLst xmlns:a="http://schemas.openxmlformats.org/drawingml/2006/main">
               <a:ext uri="{FF2B5EF4-FFF2-40B4-BE49-F238E27FC236}">
-                <a16:creationId xmlns:a16="http://schemas.microsoft.com/office/drawing/2014/main" id="{0B8BD990-5B16-4D6D-91D8-91AF37A253E9}"/>
+                <a16:creationId xmlns:a16="http://schemas.microsoft.com/office/drawing/2014/main" id="{7C70A9C6-287B-4E41-85A7-3BD2A17A64CC}"/>
               </a:ext>
             </a:extLst>
           </p:cNvPr>
@@ -3616,7 +3616,7 @@
           <p:cNvPr id="8" name="">
             <a:extLst xmlns:a="http://schemas.openxmlformats.org/drawingml/2006/main">
               <a:ext uri="{FF2B5EF4-FFF2-40B4-BE49-F238E27FC236}">
-                <a16:creationId xmlns:a16="http://schemas.microsoft.com/office/drawing/2014/main" id="{E9DD3AC4-3567-4115-95D8-571646EC4AF4}"/>
+                <a16:creationId xmlns:a16="http://schemas.microsoft.com/office/drawing/2014/main" id="{5ABCF1D1-8422-4319-97E4-DDE88F8C5700}"/>
               </a:ext>
             </a:extLst>
           </p:cNvPr>
@@ -3673,7 +3673,7 @@
           <p:cNvPr id="9" name="">
             <a:extLst xmlns:a="http://schemas.openxmlformats.org/drawingml/2006/main">
               <a:ext uri="{FF2B5EF4-FFF2-40B4-BE49-F238E27FC236}">
-                <a16:creationId xmlns:a16="http://schemas.microsoft.com/office/drawing/2014/main" id="{E68009BA-A918-4B22-889A-E9B0B74EE283}"/>
+                <a16:creationId xmlns:a16="http://schemas.microsoft.com/office/drawing/2014/main" id="{F825198E-2449-4DA2-BA26-F02DF8C02F8C}"/>
               </a:ext>
             </a:extLst>
           </p:cNvPr>
@@ -3730,7 +3730,7 @@
           <p:cNvPr id="10" name="">
             <a:extLst xmlns:a="http://schemas.openxmlformats.org/drawingml/2006/main">
               <a:ext uri="{FF2B5EF4-FFF2-40B4-BE49-F238E27FC236}">
-                <a16:creationId xmlns:a16="http://schemas.microsoft.com/office/drawing/2014/main" id="{75606472-CF65-493A-B9E7-1FC5F285AB8A}"/>
+                <a16:creationId xmlns:a16="http://schemas.microsoft.com/office/drawing/2014/main" id="{9DC30D3D-4908-4D08-8410-A5C8307426D9}"/>
               </a:ext>
             </a:extLst>
           </p:cNvPr>
@@ -3787,7 +3787,7 @@
           <p:cNvPr id="11" name="">
             <a:extLst xmlns:a="http://schemas.openxmlformats.org/drawingml/2006/main">
               <a:ext uri="{FF2B5EF4-FFF2-40B4-BE49-F238E27FC236}">
-                <a16:creationId xmlns:a16="http://schemas.microsoft.com/office/drawing/2014/main" id="{D96BB0FB-6F24-41D6-8098-09F710855F11}"/>
+                <a16:creationId xmlns:a16="http://schemas.microsoft.com/office/drawing/2014/main" id="{5A4465F9-6118-4AF2-8129-5AD4DE9161DC}"/>
               </a:ext>
             </a:extLst>
           </p:cNvPr>
@@ -3821,7 +3821,7 @@
           <p:cNvPr id="12" name="">
             <a:extLst xmlns:a="http://schemas.openxmlformats.org/drawingml/2006/main">
               <a:ext uri="{FF2B5EF4-FFF2-40B4-BE49-F238E27FC236}">
-                <a16:creationId xmlns:a16="http://schemas.microsoft.com/office/drawing/2014/main" id="{60448096-B980-4734-9006-26907CE9E297}"/>
+                <a16:creationId xmlns:a16="http://schemas.microsoft.com/office/drawing/2014/main" id="{F9C9CB22-6037-4AD3-A4D4-29F65D9B8A0D}"/>
               </a:ext>
             </a:extLst>
           </p:cNvPr>
@@ -3878,7 +3878,7 @@
           <p:cNvPr id="13" name="">
             <a:extLst xmlns:a="http://schemas.openxmlformats.org/drawingml/2006/main">
               <a:ext uri="{FF2B5EF4-FFF2-40B4-BE49-F238E27FC236}">
-                <a16:creationId xmlns:a16="http://schemas.microsoft.com/office/drawing/2014/main" id="{0BC958A3-05DD-49D8-8E11-2324A2BDFF53}"/>
+                <a16:creationId xmlns:a16="http://schemas.microsoft.com/office/drawing/2014/main" id="{18713013-7158-4CAB-AA87-DF5FD231F053}"/>
               </a:ext>
             </a:extLst>
           </p:cNvPr>
@@ -3935,7 +3935,7 @@
           <p:cNvPr id="14" name="">
             <a:extLst xmlns:a="http://schemas.openxmlformats.org/drawingml/2006/main">
               <a:ext uri="{FF2B5EF4-FFF2-40B4-BE49-F238E27FC236}">
-                <a16:creationId xmlns:a16="http://schemas.microsoft.com/office/drawing/2014/main" id="{50923920-BFEB-47F1-A582-0D19C98A1085}"/>
+                <a16:creationId xmlns:a16="http://schemas.microsoft.com/office/drawing/2014/main" id="{B5C6A9B7-6E1F-40F9-844B-DA24159B9FB8}"/>
               </a:ext>
             </a:extLst>
           </p:cNvPr>
@@ -3992,7 +3992,7 @@
           <p:cNvPr id="15" name="">
             <a:extLst xmlns:a="http://schemas.openxmlformats.org/drawingml/2006/main">
               <a:ext uri="{FF2B5EF4-FFF2-40B4-BE49-F238E27FC236}">
-                <a16:creationId xmlns:a16="http://schemas.microsoft.com/office/drawing/2014/main" id="{F61199B3-D297-46BB-A8A4-88BB55FD3D9B}"/>
+                <a16:creationId xmlns:a16="http://schemas.microsoft.com/office/drawing/2014/main" id="{28A4D1A0-4FC6-4789-8349-ECD7407A28BC}"/>
               </a:ext>
             </a:extLst>
           </p:cNvPr>
@@ -4026,7 +4026,7 @@
           <p:cNvPr id="16" name="">
             <a:extLst xmlns:a="http://schemas.openxmlformats.org/drawingml/2006/main">
               <a:ext uri="{FF2B5EF4-FFF2-40B4-BE49-F238E27FC236}">
-                <a16:creationId xmlns:a16="http://schemas.microsoft.com/office/drawing/2014/main" id="{41CF4340-6BF8-4D0D-B9FA-A70191C0BD98}"/>
+                <a16:creationId xmlns:a16="http://schemas.microsoft.com/office/drawing/2014/main" id="{FB769547-72B9-4968-A17D-FF044D967DE3}"/>
               </a:ext>
             </a:extLst>
           </p:cNvPr>
@@ -4083,7 +4083,7 @@
           <p:cNvPr id="17" name="">
             <a:extLst xmlns:a="http://schemas.openxmlformats.org/drawingml/2006/main">
               <a:ext uri="{FF2B5EF4-FFF2-40B4-BE49-F238E27FC236}">
-                <a16:creationId xmlns:a16="http://schemas.microsoft.com/office/drawing/2014/main" id="{7156DFE4-D0B7-483F-B56A-C11D14951992}"/>
+                <a16:creationId xmlns:a16="http://schemas.microsoft.com/office/drawing/2014/main" id="{B0C088CB-6912-424B-A86D-10491075C85D}"/>
               </a:ext>
             </a:extLst>
           </p:cNvPr>
@@ -4140,7 +4140,7 @@
           <p:cNvPr id="18" name="">
             <a:extLst xmlns:a="http://schemas.openxmlformats.org/drawingml/2006/main">
               <a:ext uri="{FF2B5EF4-FFF2-40B4-BE49-F238E27FC236}">
-                <a16:creationId xmlns:a16="http://schemas.microsoft.com/office/drawing/2014/main" id="{5AA709BD-4D21-4966-A6EC-22EB4D2CC520}"/>
+                <a16:creationId xmlns:a16="http://schemas.microsoft.com/office/drawing/2014/main" id="{3478AD37-4FA0-49E5-AC40-182D353735C5}"/>
               </a:ext>
             </a:extLst>
           </p:cNvPr>
@@ -4195,7 +4195,7 @@
     </p:spTree>
     <p:extLst>
       <p:ext uri="{BB962C8B-B14F-4D97-AF65-F5344CB8AC3E}">
-        <p14:creationId xmlns:p14="http://schemas.microsoft.com/office/powerpoint/2010/main" val="832471275"/>
+        <p14:creationId xmlns:p14="http://schemas.microsoft.com/office/powerpoint/2010/main" val="508524295"/>
       </p:ext>
     </p:extLst>
   </p:cSld>
@@ -4350,7 +4350,7 @@
           <p:cNvPr id="23" name="">
             <a:extLst xmlns:a="http://schemas.openxmlformats.org/drawingml/2006/main">
               <a:ext uri="{FF2B5EF4-FFF2-40B4-BE49-F238E27FC236}">
-                <a16:creationId xmlns:a16="http://schemas.microsoft.com/office/drawing/2014/main" id="{106268B5-5556-4A25-A066-73F61E1AFF4A}"/>
+                <a16:creationId xmlns:a16="http://schemas.microsoft.com/office/drawing/2014/main" id="{9EABF3A3-0E0E-41D9-B1BE-E2F8D0179173}"/>
               </a:ext>
             </a:extLst>
           </p:cNvPr>
@@ -4382,7 +4382,7 @@
           <p:cNvPr id="2" name="">
             <a:extLst xmlns:a="http://schemas.openxmlformats.org/drawingml/2006/main">
               <a:ext uri="{FF2B5EF4-FFF2-40B4-BE49-F238E27FC236}">
-                <a16:creationId xmlns:a16="http://schemas.microsoft.com/office/drawing/2014/main" id="{6DF59837-5BDC-4E92-8C70-0E5846CB216E}"/>
+                <a16:creationId xmlns:a16="http://schemas.microsoft.com/office/drawing/2014/main" id="{E0B80D79-C6DA-4037-B272-CB8F10B4B99A}"/>
               </a:ext>
             </a:extLst>
           </p:cNvPr>
@@ -4439,7 +4439,7 @@
           <p:cNvPr id="3" name="">
             <a:extLst xmlns:a="http://schemas.openxmlformats.org/drawingml/2006/main">
               <a:ext uri="{FF2B5EF4-FFF2-40B4-BE49-F238E27FC236}">
-                <a16:creationId xmlns:a16="http://schemas.microsoft.com/office/drawing/2014/main" id="{052B3172-56FD-4602-ABAA-D1792528778B}"/>
+                <a16:creationId xmlns:a16="http://schemas.microsoft.com/office/drawing/2014/main" id="{35958E7A-CB4F-404E-AFAB-EBCAE2424A56}"/>
               </a:ext>
             </a:extLst>
           </p:cNvPr>
@@ -4471,7 +4471,7 @@
           <p:cNvPr id="4" name="">
             <a:extLst xmlns:a="http://schemas.openxmlformats.org/drawingml/2006/main">
               <a:ext uri="{FF2B5EF4-FFF2-40B4-BE49-F238E27FC236}">
-                <a16:creationId xmlns:a16="http://schemas.microsoft.com/office/drawing/2014/main" id="{77D62F82-542D-4495-B413-FEF6CA6E7CDA}"/>
+                <a16:creationId xmlns:a16="http://schemas.microsoft.com/office/drawing/2014/main" id="{B1CB4668-0E91-4C81-B420-5D83BBF488E6}"/>
               </a:ext>
             </a:extLst>
           </p:cNvPr>
@@ -4528,7 +4528,7 @@
           <p:cNvPr id="5" name="">
             <a:extLst xmlns:a="http://schemas.openxmlformats.org/drawingml/2006/main">
               <a:ext uri="{FF2B5EF4-FFF2-40B4-BE49-F238E27FC236}">
-                <a16:creationId xmlns:a16="http://schemas.microsoft.com/office/drawing/2014/main" id="{38E364E0-E1B6-406D-A1DD-62221E027D4E}"/>
+                <a16:creationId xmlns:a16="http://schemas.microsoft.com/office/drawing/2014/main" id="{DAB4BDC3-DDB8-4F28-98EA-CFEA79F7CA76}"/>
               </a:ext>
             </a:extLst>
           </p:cNvPr>
@@ -4585,7 +4585,7 @@
           <p:cNvPr id="6" name="">
             <a:extLst xmlns:a="http://schemas.openxmlformats.org/drawingml/2006/main">
               <a:ext uri="{FF2B5EF4-FFF2-40B4-BE49-F238E27FC236}">
-                <a16:creationId xmlns:a16="http://schemas.microsoft.com/office/drawing/2014/main" id="{B8F0C6CB-CDDA-4A92-BD93-33EBCA165B38}"/>
+                <a16:creationId xmlns:a16="http://schemas.microsoft.com/office/drawing/2014/main" id="{DD6689DF-F30B-4AD8-A5D2-1A8F039B87A8}"/>
               </a:ext>
             </a:extLst>
           </p:cNvPr>
@@ -4642,7 +4642,7 @@
           <p:cNvPr id="7" name="">
             <a:extLst xmlns:a="http://schemas.openxmlformats.org/drawingml/2006/main">
               <a:ext uri="{FF2B5EF4-FFF2-40B4-BE49-F238E27FC236}">
-                <a16:creationId xmlns:a16="http://schemas.microsoft.com/office/drawing/2014/main" id="{C44AD191-4E15-479F-A7DE-9B4429874EB0}"/>
+                <a16:creationId xmlns:a16="http://schemas.microsoft.com/office/drawing/2014/main" id="{849B7FD2-D770-4CC3-85C9-DAB0FC0116FF}"/>
               </a:ext>
             </a:extLst>
           </p:cNvPr>
@@ -4674,7 +4674,7 @@
           <p:cNvPr id="8" name="">
             <a:extLst xmlns:a="http://schemas.openxmlformats.org/drawingml/2006/main">
               <a:ext uri="{FF2B5EF4-FFF2-40B4-BE49-F238E27FC236}">
-                <a16:creationId xmlns:a16="http://schemas.microsoft.com/office/drawing/2014/main" id="{2818BAF0-282C-45D4-A2EC-273453D9C598}"/>
+                <a16:creationId xmlns:a16="http://schemas.microsoft.com/office/drawing/2014/main" id="{1B94F102-8A16-4766-AF13-87D5B8203628}"/>
               </a:ext>
             </a:extLst>
           </p:cNvPr>
@@ -4731,7 +4731,7 @@
           <p:cNvPr id="9" name="">
             <a:extLst xmlns:a="http://schemas.openxmlformats.org/drawingml/2006/main">
               <a:ext uri="{FF2B5EF4-FFF2-40B4-BE49-F238E27FC236}">
-                <a16:creationId xmlns:a16="http://schemas.microsoft.com/office/drawing/2014/main" id="{CE758591-097A-4190-B6F2-5C96CF113842}"/>
+                <a16:creationId xmlns:a16="http://schemas.microsoft.com/office/drawing/2014/main" id="{D86C7BA0-107D-496D-9549-C86151648A2B}"/>
               </a:ext>
             </a:extLst>
           </p:cNvPr>
@@ -4788,7 +4788,7 @@
           <p:cNvPr id="10" name="">
             <a:extLst xmlns:a="http://schemas.openxmlformats.org/drawingml/2006/main">
               <a:ext uri="{FF2B5EF4-FFF2-40B4-BE49-F238E27FC236}">
-                <a16:creationId xmlns:a16="http://schemas.microsoft.com/office/drawing/2014/main" id="{ABF42127-E987-43AB-8810-8AE7328DC18C}"/>
+                <a16:creationId xmlns:a16="http://schemas.microsoft.com/office/drawing/2014/main" id="{9484A8CE-48C4-4345-A874-67C5E80E67E7}"/>
               </a:ext>
             </a:extLst>
           </p:cNvPr>
@@ -4822,7 +4822,7 @@
           <p:cNvPr id="11" name="">
             <a:extLst xmlns:a="http://schemas.openxmlformats.org/drawingml/2006/main">
               <a:ext uri="{FF2B5EF4-FFF2-40B4-BE49-F238E27FC236}">
-                <a16:creationId xmlns:a16="http://schemas.microsoft.com/office/drawing/2014/main" id="{2A1C73F3-5E1D-4543-B994-AE1188D4D0BC}"/>
+                <a16:creationId xmlns:a16="http://schemas.microsoft.com/office/drawing/2014/main" id="{3725E29C-C98F-4511-8456-2932934B7869}"/>
               </a:ext>
             </a:extLst>
           </p:cNvPr>
@@ -4854,7 +4854,7 @@
           <p:cNvPr id="12" name="">
             <a:extLst xmlns:a="http://schemas.openxmlformats.org/drawingml/2006/main">
               <a:ext uri="{FF2B5EF4-FFF2-40B4-BE49-F238E27FC236}">
-                <a16:creationId xmlns:a16="http://schemas.microsoft.com/office/drawing/2014/main" id="{C05641AD-BFFC-4958-97FF-36CD31A656D6}"/>
+                <a16:creationId xmlns:a16="http://schemas.microsoft.com/office/drawing/2014/main" id="{810C3BBF-794F-4625-AECA-80458354E424}"/>
               </a:ext>
             </a:extLst>
           </p:cNvPr>
@@ -4911,7 +4911,7 @@
           <p:cNvPr id="13" name="">
             <a:extLst xmlns:a="http://schemas.openxmlformats.org/drawingml/2006/main">
               <a:ext uri="{FF2B5EF4-FFF2-40B4-BE49-F238E27FC236}">
-                <a16:creationId xmlns:a16="http://schemas.microsoft.com/office/drawing/2014/main" id="{B621843B-F8F0-46C9-8F03-958E7684D52E}"/>
+                <a16:creationId xmlns:a16="http://schemas.microsoft.com/office/drawing/2014/main" id="{6C2F464E-2AD2-4539-86AB-80AD6E02683C}"/>
               </a:ext>
             </a:extLst>
           </p:cNvPr>
@@ -4968,7 +4968,7 @@
           <p:cNvPr id="14" name="">
             <a:extLst xmlns:a="http://schemas.openxmlformats.org/drawingml/2006/main">
               <a:ext uri="{FF2B5EF4-FFF2-40B4-BE49-F238E27FC236}">
-                <a16:creationId xmlns:a16="http://schemas.microsoft.com/office/drawing/2014/main" id="{C830BA37-B034-49C3-8535-8827621F9CC1}"/>
+                <a16:creationId xmlns:a16="http://schemas.microsoft.com/office/drawing/2014/main" id="{D8428E97-1E73-4E50-8FCF-B719D132E840}"/>
               </a:ext>
             </a:extLst>
           </p:cNvPr>
@@ -5002,7 +5002,7 @@
           <p:cNvPr id="15" name="">
             <a:extLst xmlns:a="http://schemas.openxmlformats.org/drawingml/2006/main">
               <a:ext uri="{FF2B5EF4-FFF2-40B4-BE49-F238E27FC236}">
-                <a16:creationId xmlns:a16="http://schemas.microsoft.com/office/drawing/2014/main" id="{624EED99-031A-47EA-9AF8-5C0757E615E1}"/>
+                <a16:creationId xmlns:a16="http://schemas.microsoft.com/office/drawing/2014/main" id="{F124856C-34D9-42F9-B119-9D1FA3B71EA9}"/>
               </a:ext>
             </a:extLst>
           </p:cNvPr>
@@ -5034,7 +5034,7 @@
           <p:cNvPr id="16" name="">
             <a:extLst xmlns:a="http://schemas.openxmlformats.org/drawingml/2006/main">
               <a:ext uri="{FF2B5EF4-FFF2-40B4-BE49-F238E27FC236}">
-                <a16:creationId xmlns:a16="http://schemas.microsoft.com/office/drawing/2014/main" id="{DD54905C-85BB-4D2F-9CA9-3BA1388FC7D7}"/>
+                <a16:creationId xmlns:a16="http://schemas.microsoft.com/office/drawing/2014/main" id="{5304A6E5-9335-45D6-B6A0-ED6BBC4A693A}"/>
               </a:ext>
             </a:extLst>
           </p:cNvPr>
@@ -5091,7 +5091,7 @@
           <p:cNvPr id="17" name="">
             <a:extLst xmlns:a="http://schemas.openxmlformats.org/drawingml/2006/main">
               <a:ext uri="{FF2B5EF4-FFF2-40B4-BE49-F238E27FC236}">
-                <a16:creationId xmlns:a16="http://schemas.microsoft.com/office/drawing/2014/main" id="{4AC0EB66-BCF9-43D1-B58C-03C07471F1FA}"/>
+                <a16:creationId xmlns:a16="http://schemas.microsoft.com/office/drawing/2014/main" id="{A7A2DC4C-2FCA-4DE4-95D6-084493464EA1}"/>
               </a:ext>
             </a:extLst>
           </p:cNvPr>
@@ -5148,7 +5148,7 @@
           <p:cNvPr id="18" name="">
             <a:extLst xmlns:a="http://schemas.openxmlformats.org/drawingml/2006/main">
               <a:ext uri="{FF2B5EF4-FFF2-40B4-BE49-F238E27FC236}">
-                <a16:creationId xmlns:a16="http://schemas.microsoft.com/office/drawing/2014/main" id="{A3B16557-301F-42BA-A8B7-FAB540B4D24A}"/>
+                <a16:creationId xmlns:a16="http://schemas.microsoft.com/office/drawing/2014/main" id="{573B51EA-AB1A-40A4-AFD8-DDE2A24CEFDF}"/>
               </a:ext>
             </a:extLst>
           </p:cNvPr>
@@ -5182,7 +5182,7 @@
           <p:cNvPr id="19" name="">
             <a:extLst xmlns:a="http://schemas.openxmlformats.org/drawingml/2006/main">
               <a:ext uri="{FF2B5EF4-FFF2-40B4-BE49-F238E27FC236}">
-                <a16:creationId xmlns:a16="http://schemas.microsoft.com/office/drawing/2014/main" id="{C6238272-60E4-4542-9191-12AE12C4CCBC}"/>
+                <a16:creationId xmlns:a16="http://schemas.microsoft.com/office/drawing/2014/main" id="{54A951F3-A98C-43C2-9ECD-F5047226B03D}"/>
               </a:ext>
             </a:extLst>
           </p:cNvPr>
@@ -5214,7 +5214,7 @@
           <p:cNvPr id="20" name="">
             <a:extLst xmlns:a="http://schemas.openxmlformats.org/drawingml/2006/main">
               <a:ext uri="{FF2B5EF4-FFF2-40B4-BE49-F238E27FC236}">
-                <a16:creationId xmlns:a16="http://schemas.microsoft.com/office/drawing/2014/main" id="{B7BB9E5A-6108-4CD1-BA62-63AC4424D934}"/>
+                <a16:creationId xmlns:a16="http://schemas.microsoft.com/office/drawing/2014/main" id="{F1E3F009-7004-477F-8913-B418A5B2CD69}"/>
               </a:ext>
             </a:extLst>
           </p:cNvPr>
@@ -5271,7 +5271,7 @@
           <p:cNvPr id="21" name="">
             <a:extLst xmlns:a="http://schemas.openxmlformats.org/drawingml/2006/main">
               <a:ext uri="{FF2B5EF4-FFF2-40B4-BE49-F238E27FC236}">
-                <a16:creationId xmlns:a16="http://schemas.microsoft.com/office/drawing/2014/main" id="{97554A3B-BDB4-4719-81C2-301E67FA6ADA}"/>
+                <a16:creationId xmlns:a16="http://schemas.microsoft.com/office/drawing/2014/main" id="{FAAD3AE2-47B1-450E-AA69-E1F6DE395985}"/>
               </a:ext>
             </a:extLst>
           </p:cNvPr>
@@ -5328,7 +5328,7 @@
           <p:cNvPr id="22" name="">
             <a:extLst xmlns:a="http://schemas.openxmlformats.org/drawingml/2006/main">
               <a:ext uri="{FF2B5EF4-FFF2-40B4-BE49-F238E27FC236}">
-                <a16:creationId xmlns:a16="http://schemas.microsoft.com/office/drawing/2014/main" id="{368C753D-A1C7-4566-AD0F-B30791842944}"/>
+                <a16:creationId xmlns:a16="http://schemas.microsoft.com/office/drawing/2014/main" id="{9873E342-21B8-4C07-B0EA-3AE3379D816C}"/>
               </a:ext>
             </a:extLst>
           </p:cNvPr>
@@ -5383,7 +5383,7 @@
     </p:spTree>
     <p:extLst>
       <p:ext uri="{BB962C8B-B14F-4D97-AF65-F5344CB8AC3E}">
-        <p14:creationId xmlns:p14="http://schemas.microsoft.com/office/powerpoint/2010/main" val="1298281590"/>
+        <p14:creationId xmlns:p14="http://schemas.microsoft.com/office/powerpoint/2010/main" val="1005364914"/>
       </p:ext>
     </p:extLst>
   </p:cSld>
@@ -5584,7 +5584,7 @@
           <p:cNvPr id="23" name="">
             <a:extLst xmlns:a="http://schemas.openxmlformats.org/drawingml/2006/main">
               <a:ext uri="{FF2B5EF4-FFF2-40B4-BE49-F238E27FC236}">
-                <a16:creationId xmlns:a16="http://schemas.microsoft.com/office/drawing/2014/main" id="{DF3A3CC3-C8A0-44D8-A9E9-A56577FA2CC3}"/>
+                <a16:creationId xmlns:a16="http://schemas.microsoft.com/office/drawing/2014/main" id="{821C0299-5DD9-4519-A74C-BFE8193A5784}"/>
               </a:ext>
             </a:extLst>
           </p:cNvPr>
@@ -5616,7 +5616,7 @@
           <p:cNvPr id="2" name="">
             <a:extLst xmlns:a="http://schemas.openxmlformats.org/drawingml/2006/main">
               <a:ext uri="{FF2B5EF4-FFF2-40B4-BE49-F238E27FC236}">
-                <a16:creationId xmlns:a16="http://schemas.microsoft.com/office/drawing/2014/main" id="{A0C36A47-91A2-452D-8D2E-1AF4508697F4}"/>
+                <a16:creationId xmlns:a16="http://schemas.microsoft.com/office/drawing/2014/main" id="{FB775A83-6FAF-4979-8E99-13E4493D377E}"/>
               </a:ext>
             </a:extLst>
           </p:cNvPr>
@@ -5673,7 +5673,7 @@
           <p:cNvPr id="3" name="">
             <a:extLst xmlns:a="http://schemas.openxmlformats.org/drawingml/2006/main">
               <a:ext uri="{FF2B5EF4-FFF2-40B4-BE49-F238E27FC236}">
-                <a16:creationId xmlns:a16="http://schemas.microsoft.com/office/drawing/2014/main" id="{3F8E34E6-0C50-443C-91FE-315DBD863A3D}"/>
+                <a16:creationId xmlns:a16="http://schemas.microsoft.com/office/drawing/2014/main" id="{3514AE40-4C7B-4BD7-B8C3-5EE8D978B0F2}"/>
               </a:ext>
             </a:extLst>
           </p:cNvPr>
@@ -5705,7 +5705,7 @@
           <p:cNvPr id="4" name="">
             <a:extLst xmlns:a="http://schemas.openxmlformats.org/drawingml/2006/main">
               <a:ext uri="{FF2B5EF4-FFF2-40B4-BE49-F238E27FC236}">
-                <a16:creationId xmlns:a16="http://schemas.microsoft.com/office/drawing/2014/main" id="{87785711-D672-4705-85E2-6DD0E2871825}"/>
+                <a16:creationId xmlns:a16="http://schemas.microsoft.com/office/drawing/2014/main" id="{440CB868-0D8F-41B4-A39B-7BCCAA982187}"/>
               </a:ext>
             </a:extLst>
           </p:cNvPr>
@@ -5762,7 +5762,7 @@
           <p:cNvPr id="5" name="">
             <a:extLst xmlns:a="http://schemas.openxmlformats.org/drawingml/2006/main">
               <a:ext uri="{FF2B5EF4-FFF2-40B4-BE49-F238E27FC236}">
-                <a16:creationId xmlns:a16="http://schemas.microsoft.com/office/drawing/2014/main" id="{3B1C3D62-D665-4856-8920-6BEBBF7D938E}"/>
+                <a16:creationId xmlns:a16="http://schemas.microsoft.com/office/drawing/2014/main" id="{CCE3BE8C-D73C-44FD-A848-10E1FDC43C04}"/>
               </a:ext>
             </a:extLst>
           </p:cNvPr>
@@ -5819,7 +5819,7 @@
           <p:cNvPr id="6" name="">
             <a:extLst xmlns:a="http://schemas.openxmlformats.org/drawingml/2006/main">
               <a:ext uri="{FF2B5EF4-FFF2-40B4-BE49-F238E27FC236}">
-                <a16:creationId xmlns:a16="http://schemas.microsoft.com/office/drawing/2014/main" id="{D52B7487-1C3D-4CFB-B907-E7A021090A11}"/>
+                <a16:creationId xmlns:a16="http://schemas.microsoft.com/office/drawing/2014/main" id="{9AF50D1B-69A3-429F-B75F-745619948364}"/>
               </a:ext>
             </a:extLst>
           </p:cNvPr>
@@ -5876,7 +5876,7 @@
           <p:cNvPr id="7" name="">
             <a:extLst xmlns:a="http://schemas.openxmlformats.org/drawingml/2006/main">
               <a:ext uri="{FF2B5EF4-FFF2-40B4-BE49-F238E27FC236}">
-                <a16:creationId xmlns:a16="http://schemas.microsoft.com/office/drawing/2014/main" id="{ECC65570-3F73-4DE0-B7C2-CE8FEA8F631B}"/>
+                <a16:creationId xmlns:a16="http://schemas.microsoft.com/office/drawing/2014/main" id="{FA656AFD-83FE-4DC3-A928-9E7A13BA1FCB}"/>
               </a:ext>
             </a:extLst>
           </p:cNvPr>
@@ -5908,7 +5908,7 @@
           <p:cNvPr id="8" name="">
             <a:extLst xmlns:a="http://schemas.openxmlformats.org/drawingml/2006/main">
               <a:ext uri="{FF2B5EF4-FFF2-40B4-BE49-F238E27FC236}">
-                <a16:creationId xmlns:a16="http://schemas.microsoft.com/office/drawing/2014/main" id="{2F4E6F5E-39EB-416B-BBB6-7F699D89CE7F}"/>
+                <a16:creationId xmlns:a16="http://schemas.microsoft.com/office/drawing/2014/main" id="{A88B77DF-2FBB-42FC-BAD5-488A6B75D43F}"/>
               </a:ext>
             </a:extLst>
           </p:cNvPr>
@@ -5965,7 +5965,7 @@
           <p:cNvPr id="9" name="">
             <a:extLst xmlns:a="http://schemas.openxmlformats.org/drawingml/2006/main">
               <a:ext uri="{FF2B5EF4-FFF2-40B4-BE49-F238E27FC236}">
-                <a16:creationId xmlns:a16="http://schemas.microsoft.com/office/drawing/2014/main" id="{B3420A14-05E3-4832-AEB5-E83A095CD438}"/>
+                <a16:creationId xmlns:a16="http://schemas.microsoft.com/office/drawing/2014/main" id="{5FEDEE76-6A05-426A-80F7-2534347ABF22}"/>
               </a:ext>
             </a:extLst>
           </p:cNvPr>
@@ -6022,7 +6022,7 @@
           <p:cNvPr id="10" name="">
             <a:extLst xmlns:a="http://schemas.openxmlformats.org/drawingml/2006/main">
               <a:ext uri="{FF2B5EF4-FFF2-40B4-BE49-F238E27FC236}">
-                <a16:creationId xmlns:a16="http://schemas.microsoft.com/office/drawing/2014/main" id="{55FE4144-9B2B-42C8-9345-F99703EB8153}"/>
+                <a16:creationId xmlns:a16="http://schemas.microsoft.com/office/drawing/2014/main" id="{A152E05C-A27A-4889-9E2A-F5F946FEA351}"/>
               </a:ext>
             </a:extLst>
           </p:cNvPr>
@@ -6056,7 +6056,7 @@
           <p:cNvPr id="11" name="">
             <a:extLst xmlns:a="http://schemas.openxmlformats.org/drawingml/2006/main">
               <a:ext uri="{FF2B5EF4-FFF2-40B4-BE49-F238E27FC236}">
-                <a16:creationId xmlns:a16="http://schemas.microsoft.com/office/drawing/2014/main" id="{840F259D-20F8-4349-B12E-487788F44719}"/>
+                <a16:creationId xmlns:a16="http://schemas.microsoft.com/office/drawing/2014/main" id="{BE15533D-12B8-4EF8-BA72-24D84607152A}"/>
               </a:ext>
             </a:extLst>
           </p:cNvPr>
@@ -6088,7 +6088,7 @@
           <p:cNvPr id="12" name="">
             <a:extLst xmlns:a="http://schemas.openxmlformats.org/drawingml/2006/main">
               <a:ext uri="{FF2B5EF4-FFF2-40B4-BE49-F238E27FC236}">
-                <a16:creationId xmlns:a16="http://schemas.microsoft.com/office/drawing/2014/main" id="{7613E07E-152B-45D5-90FD-029F4573982A}"/>
+                <a16:creationId xmlns:a16="http://schemas.microsoft.com/office/drawing/2014/main" id="{A8880B10-1366-46BE-8104-D2534424ED1E}"/>
               </a:ext>
             </a:extLst>
           </p:cNvPr>
@@ -6145,7 +6145,7 @@
           <p:cNvPr id="13" name="">
             <a:extLst xmlns:a="http://schemas.openxmlformats.org/drawingml/2006/main">
               <a:ext uri="{FF2B5EF4-FFF2-40B4-BE49-F238E27FC236}">
-                <a16:creationId xmlns:a16="http://schemas.microsoft.com/office/drawing/2014/main" id="{B9476530-6728-42A8-92D8-3EF04D70D1E9}"/>
+                <a16:creationId xmlns:a16="http://schemas.microsoft.com/office/drawing/2014/main" id="{C0455911-6212-4753-9143-15CCFCA7F6E7}"/>
               </a:ext>
             </a:extLst>
           </p:cNvPr>
@@ -6202,7 +6202,7 @@
           <p:cNvPr id="14" name="">
             <a:extLst xmlns:a="http://schemas.openxmlformats.org/drawingml/2006/main">
               <a:ext uri="{FF2B5EF4-FFF2-40B4-BE49-F238E27FC236}">
-                <a16:creationId xmlns:a16="http://schemas.microsoft.com/office/drawing/2014/main" id="{95619DE1-0FB3-4827-B233-6E6BF5111A6E}"/>
+                <a16:creationId xmlns:a16="http://schemas.microsoft.com/office/drawing/2014/main" id="{05D1C1DA-EB3A-462D-8287-A63B767982FE}"/>
               </a:ext>
             </a:extLst>
           </p:cNvPr>
@@ -6236,7 +6236,7 @@
           <p:cNvPr id="15" name="">
             <a:extLst xmlns:a="http://schemas.openxmlformats.org/drawingml/2006/main">
               <a:ext uri="{FF2B5EF4-FFF2-40B4-BE49-F238E27FC236}">
-                <a16:creationId xmlns:a16="http://schemas.microsoft.com/office/drawing/2014/main" id="{DE22EA19-045A-4E5B-A5B5-58C6730377BD}"/>
+                <a16:creationId xmlns:a16="http://schemas.microsoft.com/office/drawing/2014/main" id="{837778C9-B98F-4724-AFCF-94A2D38E3CFC}"/>
               </a:ext>
             </a:extLst>
           </p:cNvPr>
@@ -6268,7 +6268,7 @@
           <p:cNvPr id="16" name="">
             <a:extLst xmlns:a="http://schemas.openxmlformats.org/drawingml/2006/main">
               <a:ext uri="{FF2B5EF4-FFF2-40B4-BE49-F238E27FC236}">
-                <a16:creationId xmlns:a16="http://schemas.microsoft.com/office/drawing/2014/main" id="{47F041AA-CE7A-4435-B933-2E81E02D5FF0}"/>
+                <a16:creationId xmlns:a16="http://schemas.microsoft.com/office/drawing/2014/main" id="{BFD0E0AC-870A-4A62-AB3A-C8BF69B61619}"/>
               </a:ext>
             </a:extLst>
           </p:cNvPr>
@@ -6325,7 +6325,7 @@
           <p:cNvPr id="17" name="">
             <a:extLst xmlns:a="http://schemas.openxmlformats.org/drawingml/2006/main">
               <a:ext uri="{FF2B5EF4-FFF2-40B4-BE49-F238E27FC236}">
-                <a16:creationId xmlns:a16="http://schemas.microsoft.com/office/drawing/2014/main" id="{E1C7475B-ADFC-4170-B862-D065ADA14F99}"/>
+                <a16:creationId xmlns:a16="http://schemas.microsoft.com/office/drawing/2014/main" id="{28D9FEE2-C268-4DFF-A9D3-2BFD4C2B28AF}"/>
               </a:ext>
             </a:extLst>
           </p:cNvPr>
@@ -6382,7 +6382,7 @@
           <p:cNvPr id="18" name="">
             <a:extLst xmlns:a="http://schemas.openxmlformats.org/drawingml/2006/main">
               <a:ext uri="{FF2B5EF4-FFF2-40B4-BE49-F238E27FC236}">
-                <a16:creationId xmlns:a16="http://schemas.microsoft.com/office/drawing/2014/main" id="{705D8FA0-E28B-4884-BE2A-618720444927}"/>
+                <a16:creationId xmlns:a16="http://schemas.microsoft.com/office/drawing/2014/main" id="{0686EBBE-A391-4B7D-86D4-10CDE623CB2F}"/>
               </a:ext>
             </a:extLst>
           </p:cNvPr>
@@ -6416,7 +6416,7 @@
           <p:cNvPr id="19" name="">
             <a:extLst xmlns:a="http://schemas.openxmlformats.org/drawingml/2006/main">
               <a:ext uri="{FF2B5EF4-FFF2-40B4-BE49-F238E27FC236}">
-                <a16:creationId xmlns:a16="http://schemas.microsoft.com/office/drawing/2014/main" id="{1D19D2AF-92EB-43AB-9AEF-4DC398606155}"/>
+                <a16:creationId xmlns:a16="http://schemas.microsoft.com/office/drawing/2014/main" id="{B40AE0E0-2B4C-41EE-AD27-ECA4688BFBC7}"/>
               </a:ext>
             </a:extLst>
           </p:cNvPr>
@@ -6448,7 +6448,7 @@
           <p:cNvPr id="20" name="">
             <a:extLst xmlns:a="http://schemas.openxmlformats.org/drawingml/2006/main">
               <a:ext uri="{FF2B5EF4-FFF2-40B4-BE49-F238E27FC236}">
-                <a16:creationId xmlns:a16="http://schemas.microsoft.com/office/drawing/2014/main" id="{1416B028-2828-4185-98F6-0D33CB60D224}"/>
+                <a16:creationId xmlns:a16="http://schemas.microsoft.com/office/drawing/2014/main" id="{B224F865-A09E-48F7-A6B7-EDA82AC67CC4}"/>
               </a:ext>
             </a:extLst>
           </p:cNvPr>
@@ -6505,7 +6505,7 @@
           <p:cNvPr id="21" name="">
             <a:extLst xmlns:a="http://schemas.openxmlformats.org/drawingml/2006/main">
               <a:ext uri="{FF2B5EF4-FFF2-40B4-BE49-F238E27FC236}">
-                <a16:creationId xmlns:a16="http://schemas.microsoft.com/office/drawing/2014/main" id="{48E1498E-5D55-4E98-A90D-98A5DD4518F1}"/>
+                <a16:creationId xmlns:a16="http://schemas.microsoft.com/office/drawing/2014/main" id="{5CEC86A9-4BC0-4F47-B021-5D1DBD219E93}"/>
               </a:ext>
             </a:extLst>
           </p:cNvPr>
@@ -6562,7 +6562,7 @@
           <p:cNvPr id="22" name="">
             <a:extLst xmlns:a="http://schemas.openxmlformats.org/drawingml/2006/main">
               <a:ext uri="{FF2B5EF4-FFF2-40B4-BE49-F238E27FC236}">
-                <a16:creationId xmlns:a16="http://schemas.microsoft.com/office/drawing/2014/main" id="{B8EC03BF-9898-47D2-8BF8-4162912DD1F5}"/>
+                <a16:creationId xmlns:a16="http://schemas.microsoft.com/office/drawing/2014/main" id="{22FCF335-0A31-4B24-BF0D-255C958FF072}"/>
               </a:ext>
             </a:extLst>
           </p:cNvPr>
@@ -6617,7 +6617,7 @@
     </p:spTree>
     <p:extLst>
       <p:ext uri="{BB962C8B-B14F-4D97-AF65-F5344CB8AC3E}">
-        <p14:creationId xmlns:p14="http://schemas.microsoft.com/office/powerpoint/2010/main" val="1654246773"/>
+        <p14:creationId xmlns:p14="http://schemas.microsoft.com/office/powerpoint/2010/main" val="1554833068"/>
       </p:ext>
     </p:extLst>
   </p:cSld>
@@ -6818,7 +6818,7 @@
           <p:cNvPr id="16" name="">
             <a:extLst xmlns:a="http://schemas.openxmlformats.org/drawingml/2006/main">
               <a:ext uri="{FF2B5EF4-FFF2-40B4-BE49-F238E27FC236}">
-                <a16:creationId xmlns:a16="http://schemas.microsoft.com/office/drawing/2014/main" id="{B68D5DEF-45DE-49D7-9D88-CCCFB7119F83}"/>
+                <a16:creationId xmlns:a16="http://schemas.microsoft.com/office/drawing/2014/main" id="{69BCB606-BFE4-4262-9F4A-E035AF082107}"/>
               </a:ext>
             </a:extLst>
           </p:cNvPr>
@@ -6850,7 +6850,7 @@
           <p:cNvPr id="2" name="">
             <a:extLst xmlns:a="http://schemas.openxmlformats.org/drawingml/2006/main">
               <a:ext uri="{FF2B5EF4-FFF2-40B4-BE49-F238E27FC236}">
-                <a16:creationId xmlns:a16="http://schemas.microsoft.com/office/drawing/2014/main" id="{69037D0C-6892-406A-A19E-4FEA2D8E0F2A}"/>
+                <a16:creationId xmlns:a16="http://schemas.microsoft.com/office/drawing/2014/main" id="{E1070176-D2C0-4997-8E92-FF7AA5EFC812}"/>
               </a:ext>
             </a:extLst>
           </p:cNvPr>
@@ -6907,7 +6907,7 @@
           <p:cNvPr id="3" name="">
             <a:extLst xmlns:a="http://schemas.openxmlformats.org/drawingml/2006/main">
               <a:ext uri="{FF2B5EF4-FFF2-40B4-BE49-F238E27FC236}">
-                <a16:creationId xmlns:a16="http://schemas.microsoft.com/office/drawing/2014/main" id="{EB62D285-28E8-44DB-9F4B-850991F599F9}"/>
+                <a16:creationId xmlns:a16="http://schemas.microsoft.com/office/drawing/2014/main" id="{9DAFE5EC-28DF-4C95-9A75-80ACD75BE82E}"/>
               </a:ext>
             </a:extLst>
           </p:cNvPr>
@@ -6939,7 +6939,7 @@
           <p:cNvPr id="4" name="">
             <a:extLst xmlns:a="http://schemas.openxmlformats.org/drawingml/2006/main">
               <a:ext uri="{FF2B5EF4-FFF2-40B4-BE49-F238E27FC236}">
-                <a16:creationId xmlns:a16="http://schemas.microsoft.com/office/drawing/2014/main" id="{BFE9A201-664C-4755-A2B3-D2088A50AF28}"/>
+                <a16:creationId xmlns:a16="http://schemas.microsoft.com/office/drawing/2014/main" id="{ACDBCBDB-1DB0-4EFD-9FE0-B69179175ABF}"/>
               </a:ext>
             </a:extLst>
           </p:cNvPr>
@@ -6996,7 +6996,7 @@
           <p:cNvPr id="5" name="">
             <a:extLst xmlns:a="http://schemas.openxmlformats.org/drawingml/2006/main">
               <a:ext uri="{FF2B5EF4-FFF2-40B4-BE49-F238E27FC236}">
-                <a16:creationId xmlns:a16="http://schemas.microsoft.com/office/drawing/2014/main" id="{74805020-0ACF-4631-BBFE-F442848CED9A}"/>
+                <a16:creationId xmlns:a16="http://schemas.microsoft.com/office/drawing/2014/main" id="{580F3829-C8FA-40B7-B334-E8ABDD9EE56D}"/>
               </a:ext>
             </a:extLst>
           </p:cNvPr>
@@ -7053,7 +7053,7 @@
           <p:cNvPr id="6" name="">
             <a:extLst xmlns:a="http://schemas.openxmlformats.org/drawingml/2006/main">
               <a:ext uri="{FF2B5EF4-FFF2-40B4-BE49-F238E27FC236}">
-                <a16:creationId xmlns:a16="http://schemas.microsoft.com/office/drawing/2014/main" id="{A264CDF6-52A7-477B-A65F-1D09F44C58C2}"/>
+                <a16:creationId xmlns:a16="http://schemas.microsoft.com/office/drawing/2014/main" id="{3620E229-C43C-44D6-B318-2E5A236ED307}"/>
               </a:ext>
             </a:extLst>
           </p:cNvPr>
@@ -7110,7 +7110,7 @@
           <p:cNvPr id="7" name="">
             <a:extLst xmlns:a="http://schemas.openxmlformats.org/drawingml/2006/main">
               <a:ext uri="{FF2B5EF4-FFF2-40B4-BE49-F238E27FC236}">
-                <a16:creationId xmlns:a16="http://schemas.microsoft.com/office/drawing/2014/main" id="{52135602-8860-4186-AF3F-6E5DEBBA6B66}"/>
+                <a16:creationId xmlns:a16="http://schemas.microsoft.com/office/drawing/2014/main" id="{A5634DB7-74FC-4C57-9A12-08D2ABD8A172}"/>
               </a:ext>
             </a:extLst>
           </p:cNvPr>
@@ -7142,7 +7142,7 @@
           <p:cNvPr id="8" name="">
             <a:extLst xmlns:a="http://schemas.openxmlformats.org/drawingml/2006/main">
               <a:ext uri="{FF2B5EF4-FFF2-40B4-BE49-F238E27FC236}">
-                <a16:creationId xmlns:a16="http://schemas.microsoft.com/office/drawing/2014/main" id="{1907541E-CF33-4F98-9E39-0FBC2C947DEE}"/>
+                <a16:creationId xmlns:a16="http://schemas.microsoft.com/office/drawing/2014/main" id="{C1934E47-3557-4021-A027-ADCAC583F9DF}"/>
               </a:ext>
             </a:extLst>
           </p:cNvPr>
@@ -7199,7 +7199,7 @@
           <p:cNvPr id="9" name="">
             <a:extLst xmlns:a="http://schemas.openxmlformats.org/drawingml/2006/main">
               <a:ext uri="{FF2B5EF4-FFF2-40B4-BE49-F238E27FC236}">
-                <a16:creationId xmlns:a16="http://schemas.microsoft.com/office/drawing/2014/main" id="{97DCED2E-CACC-41F7-869D-F5E3AE83C4CE}"/>
+                <a16:creationId xmlns:a16="http://schemas.microsoft.com/office/drawing/2014/main" id="{C1819060-DBFD-4F9D-B48F-44CC4AD8DD48}"/>
               </a:ext>
             </a:extLst>
           </p:cNvPr>
@@ -7256,7 +7256,7 @@
           <p:cNvPr id="10" name="">
             <a:extLst xmlns:a="http://schemas.openxmlformats.org/drawingml/2006/main">
               <a:ext uri="{FF2B5EF4-FFF2-40B4-BE49-F238E27FC236}">
-                <a16:creationId xmlns:a16="http://schemas.microsoft.com/office/drawing/2014/main" id="{73CF6977-E7B1-4097-B567-8253B108604B}"/>
+                <a16:creationId xmlns:a16="http://schemas.microsoft.com/office/drawing/2014/main" id="{2F855C23-D5F9-4BD1-BEF4-EB35949971B0}"/>
               </a:ext>
             </a:extLst>
           </p:cNvPr>
@@ -7313,7 +7313,7 @@
           <p:cNvPr id="11" name="">
             <a:extLst xmlns:a="http://schemas.openxmlformats.org/drawingml/2006/main">
               <a:ext uri="{FF2B5EF4-FFF2-40B4-BE49-F238E27FC236}">
-                <a16:creationId xmlns:a16="http://schemas.microsoft.com/office/drawing/2014/main" id="{E78DF07D-BF0E-42E5-A89D-5A12F3E6024B}"/>
+                <a16:creationId xmlns:a16="http://schemas.microsoft.com/office/drawing/2014/main" id="{28986A26-93D0-4A2A-B0CC-497ECBCA665E}"/>
               </a:ext>
             </a:extLst>
           </p:cNvPr>
@@ -7345,7 +7345,7 @@
           <p:cNvPr id="12" name="">
             <a:extLst xmlns:a="http://schemas.openxmlformats.org/drawingml/2006/main">
               <a:ext uri="{FF2B5EF4-FFF2-40B4-BE49-F238E27FC236}">
-                <a16:creationId xmlns:a16="http://schemas.microsoft.com/office/drawing/2014/main" id="{07E6C1C7-2573-4803-A662-9E59471C6811}"/>
+                <a16:creationId xmlns:a16="http://schemas.microsoft.com/office/drawing/2014/main" id="{BE5971BA-D433-46E5-AC5C-D1BE13024CFD}"/>
               </a:ext>
             </a:extLst>
           </p:cNvPr>
@@ -7402,7 +7402,7 @@
           <p:cNvPr id="13" name="">
             <a:extLst xmlns:a="http://schemas.openxmlformats.org/drawingml/2006/main">
               <a:ext uri="{FF2B5EF4-FFF2-40B4-BE49-F238E27FC236}">
-                <a16:creationId xmlns:a16="http://schemas.microsoft.com/office/drawing/2014/main" id="{2FDA1684-F33F-4688-A14A-7E1E5D7A39B9}"/>
+                <a16:creationId xmlns:a16="http://schemas.microsoft.com/office/drawing/2014/main" id="{D795C8AD-303A-4853-8CF2-C9ED391559E7}"/>
               </a:ext>
             </a:extLst>
           </p:cNvPr>
@@ -7459,7 +7459,7 @@
           <p:cNvPr id="14" name="">
             <a:extLst xmlns:a="http://schemas.openxmlformats.org/drawingml/2006/main">
               <a:ext uri="{FF2B5EF4-FFF2-40B4-BE49-F238E27FC236}">
-                <a16:creationId xmlns:a16="http://schemas.microsoft.com/office/drawing/2014/main" id="{63E6373B-4843-40D6-86CC-643EE140CBC7}"/>
+                <a16:creationId xmlns:a16="http://schemas.microsoft.com/office/drawing/2014/main" id="{A37D6F33-87CA-4888-8914-AD6B7D4E9722}"/>
               </a:ext>
             </a:extLst>
           </p:cNvPr>
@@ -7516,7 +7516,7 @@
           <p:cNvPr id="15" name="">
             <a:extLst xmlns:a="http://schemas.openxmlformats.org/drawingml/2006/main">
               <a:ext uri="{FF2B5EF4-FFF2-40B4-BE49-F238E27FC236}">
-                <a16:creationId xmlns:a16="http://schemas.microsoft.com/office/drawing/2014/main" id="{68C629FE-52F3-4BC9-8A96-E02C85D7A910}"/>
+                <a16:creationId xmlns:a16="http://schemas.microsoft.com/office/drawing/2014/main" id="{4E653E3C-CEB6-4675-8E1D-83F286FAA36E}"/>
               </a:ext>
             </a:extLst>
           </p:cNvPr>
@@ -7571,7 +7571,7 @@
     </p:spTree>
     <p:extLst>
       <p:ext uri="{BB962C8B-B14F-4D97-AF65-F5344CB8AC3E}">
-        <p14:creationId xmlns:p14="http://schemas.microsoft.com/office/powerpoint/2010/main" val="1599120774"/>
+        <p14:creationId xmlns:p14="http://schemas.microsoft.com/office/powerpoint/2010/main" val="704945309"/>
       </p:ext>
     </p:extLst>
   </p:cSld>
@@ -7772,7 +7772,7 @@
           <p:cNvPr id="23" name="">
             <a:extLst xmlns:a="http://schemas.openxmlformats.org/drawingml/2006/main">
               <a:ext uri="{FF2B5EF4-FFF2-40B4-BE49-F238E27FC236}">
-                <a16:creationId xmlns:a16="http://schemas.microsoft.com/office/drawing/2014/main" id="{54555208-E878-42EE-86A3-B7655F65BF1C}"/>
+                <a16:creationId xmlns:a16="http://schemas.microsoft.com/office/drawing/2014/main" id="{686D08A0-49E7-4FB7-9A50-0A42C23598B6}"/>
               </a:ext>
             </a:extLst>
           </p:cNvPr>
@@ -7804,7 +7804,7 @@
           <p:cNvPr id="2" name="">
             <a:extLst xmlns:a="http://schemas.openxmlformats.org/drawingml/2006/main">
               <a:ext uri="{FF2B5EF4-FFF2-40B4-BE49-F238E27FC236}">
-                <a16:creationId xmlns:a16="http://schemas.microsoft.com/office/drawing/2014/main" id="{1039A1A1-FF50-4C8E-9C20-B5DF2D548C16}"/>
+                <a16:creationId xmlns:a16="http://schemas.microsoft.com/office/drawing/2014/main" id="{81B77A71-D95B-4A93-B5E4-6C83465FD581}"/>
               </a:ext>
             </a:extLst>
           </p:cNvPr>
@@ -7861,7 +7861,7 @@
           <p:cNvPr id="3" name="">
             <a:extLst xmlns:a="http://schemas.openxmlformats.org/drawingml/2006/main">
               <a:ext uri="{FF2B5EF4-FFF2-40B4-BE49-F238E27FC236}">
-                <a16:creationId xmlns:a16="http://schemas.microsoft.com/office/drawing/2014/main" id="{F28A2B65-D3C0-4B4F-97DF-9D83C670488F}"/>
+                <a16:creationId xmlns:a16="http://schemas.microsoft.com/office/drawing/2014/main" id="{1DA1F8A4-6A3D-48C4-ABEF-92FBAEBE8A49}"/>
               </a:ext>
             </a:extLst>
           </p:cNvPr>
@@ -7893,7 +7893,7 @@
           <p:cNvPr id="4" name="">
             <a:extLst xmlns:a="http://schemas.openxmlformats.org/drawingml/2006/main">
               <a:ext uri="{FF2B5EF4-FFF2-40B4-BE49-F238E27FC236}">
-                <a16:creationId xmlns:a16="http://schemas.microsoft.com/office/drawing/2014/main" id="{B89A4459-8400-46C0-BA02-A65D5088EDE6}"/>
+                <a16:creationId xmlns:a16="http://schemas.microsoft.com/office/drawing/2014/main" id="{B37EB4FE-8436-4F08-8B92-315843660ADD}"/>
               </a:ext>
             </a:extLst>
           </p:cNvPr>
@@ -7950,7 +7950,7 @@
           <p:cNvPr id="5" name="">
             <a:extLst xmlns:a="http://schemas.openxmlformats.org/drawingml/2006/main">
               <a:ext uri="{FF2B5EF4-FFF2-40B4-BE49-F238E27FC236}">
-                <a16:creationId xmlns:a16="http://schemas.microsoft.com/office/drawing/2014/main" id="{2B36A968-3237-452F-9CCF-BEF9F1A017C9}"/>
+                <a16:creationId xmlns:a16="http://schemas.microsoft.com/office/drawing/2014/main" id="{AF75F7C0-A6A5-4733-AD7B-831832C951B9}"/>
               </a:ext>
             </a:extLst>
           </p:cNvPr>
@@ -8007,7 +8007,7 @@
           <p:cNvPr id="6" name="">
             <a:extLst xmlns:a="http://schemas.openxmlformats.org/drawingml/2006/main">
               <a:ext uri="{FF2B5EF4-FFF2-40B4-BE49-F238E27FC236}">
-                <a16:creationId xmlns:a16="http://schemas.microsoft.com/office/drawing/2014/main" id="{C3F8EBB7-1386-4C9F-9D56-8C796BAED306}"/>
+                <a16:creationId xmlns:a16="http://schemas.microsoft.com/office/drawing/2014/main" id="{B1A60657-32D2-4B6E-88EB-7C8CF1832834}"/>
               </a:ext>
             </a:extLst>
           </p:cNvPr>
@@ -8064,7 +8064,7 @@
           <p:cNvPr id="7" name="">
             <a:extLst xmlns:a="http://schemas.openxmlformats.org/drawingml/2006/main">
               <a:ext uri="{FF2B5EF4-FFF2-40B4-BE49-F238E27FC236}">
-                <a16:creationId xmlns:a16="http://schemas.microsoft.com/office/drawing/2014/main" id="{C4E957B6-0B62-4777-9822-4B8F674AC13B}"/>
+                <a16:creationId xmlns:a16="http://schemas.microsoft.com/office/drawing/2014/main" id="{9726C541-25D2-4382-88E2-A8E85DAE22D4}"/>
               </a:ext>
             </a:extLst>
           </p:cNvPr>
@@ -8096,7 +8096,7 @@
           <p:cNvPr id="8" name="">
             <a:extLst xmlns:a="http://schemas.openxmlformats.org/drawingml/2006/main">
               <a:ext uri="{FF2B5EF4-FFF2-40B4-BE49-F238E27FC236}">
-                <a16:creationId xmlns:a16="http://schemas.microsoft.com/office/drawing/2014/main" id="{3A32CCC5-08D5-4713-B39D-8FB822D68188}"/>
+                <a16:creationId xmlns:a16="http://schemas.microsoft.com/office/drawing/2014/main" id="{6B7DBA1E-AC15-430E-A9F2-6BFAE8202587}"/>
               </a:ext>
             </a:extLst>
           </p:cNvPr>
@@ -8153,7 +8153,7 @@
           <p:cNvPr id="9" name="">
             <a:extLst xmlns:a="http://schemas.openxmlformats.org/drawingml/2006/main">
               <a:ext uri="{FF2B5EF4-FFF2-40B4-BE49-F238E27FC236}">
-                <a16:creationId xmlns:a16="http://schemas.microsoft.com/office/drawing/2014/main" id="{5A520985-CDCD-4E58-B8B9-DB7E181E5AA7}"/>
+                <a16:creationId xmlns:a16="http://schemas.microsoft.com/office/drawing/2014/main" id="{81E98C3D-CBF4-4208-B9E4-4AEDF4B715FC}"/>
               </a:ext>
             </a:extLst>
           </p:cNvPr>
@@ -8210,19 +8210,19 @@
           <p:cNvPr id="10" name="">
             <a:extLst xmlns:a="http://schemas.openxmlformats.org/drawingml/2006/main">
               <a:ext uri="{FF2B5EF4-FFF2-40B4-BE49-F238E27FC236}">
-                <a16:creationId xmlns:a16="http://schemas.microsoft.com/office/drawing/2014/main" id="{FB2CCCF3-207A-4396-BBA2-4195DC601D37}"/>
-              </a:ext>
-            </a:extLst>
-          </p:cNvPr>
-          <p:cNvSpPr>
-            <a:spLocks xmlns:a="http://schemas.openxmlformats.org/drawingml/2006/main" noGrp="1"/>
-          </p:cNvSpPr>
-          <p:nvPr/>
-        </p:nvSpPr>
-        <p:spPr>
-          <a:xfrm xmlns:a="http://schemas.openxmlformats.org/drawingml/2006/main">
-            <a:off x="914400" y="1257300"/>
-            <a:ext cx="10363200" cy="781050"/>
+                <a16:creationId xmlns:a16="http://schemas.microsoft.com/office/drawing/2014/main" id="{5A06CC19-2FCD-4293-925E-D525D378E510}"/>
+              </a:ext>
+            </a:extLst>
+          </p:cNvPr>
+          <p:cNvSpPr>
+            <a:spLocks xmlns:a="http://schemas.openxmlformats.org/drawingml/2006/main" noGrp="1"/>
+          </p:cNvSpPr>
+          <p:nvPr/>
+        </p:nvSpPr>
+        <p:spPr>
+          <a:xfrm xmlns:a="http://schemas.openxmlformats.org/drawingml/2006/main">
+            <a:off x="857250" y="1219200"/>
+            <a:ext cx="10477500" cy="742950"/>
           </a:xfrm>
           <a:prstGeom xmlns:a="http://schemas.openxmlformats.org/drawingml/2006/main" prst="rect">
             <a:avLst/>
@@ -8239,7 +8239,7 @@
           <a:lstStyle xmlns:a="http://schemas.openxmlformats.org/drawingml/2006/main"/>
           <a:p xmlns:a="http://schemas.openxmlformats.org/drawingml/2006/main">
             <a:pPr algn="ctr">
-              <a:defRPr sz="2175" b="1">
+              <a:defRPr sz="2100" b="1">
                 <a:solidFill>
                   <a:srgbClr val="17253A"/>
                 </a:solidFill>
@@ -8249,7 +8249,7 @@
               </a:defRPr>
             </a:pPr>
             <a:r>
-              <a:rPr sz="2175" b="1">
+              <a:rPr sz="2100" b="1">
                 <a:solidFill>
                   <a:srgbClr val="17253A"/>
                 </a:solidFill>
@@ -8267,28 +8267,30 @@
           <p:cNvPr id="11" name="">
             <a:extLst xmlns:a="http://schemas.openxmlformats.org/drawingml/2006/main">
               <a:ext uri="{FF2B5EF4-FFF2-40B4-BE49-F238E27FC236}">
-                <a16:creationId xmlns:a16="http://schemas.microsoft.com/office/drawing/2014/main" id="{04F5F17B-1DBD-4CA8-9814-3F00C071A2F9}"/>
-              </a:ext>
-            </a:extLst>
-          </p:cNvPr>
-          <p:cNvSpPr>
-            <a:spLocks xmlns:a="http://schemas.openxmlformats.org/drawingml/2006/main" noGrp="1"/>
-          </p:cNvSpPr>
-          <p:nvPr/>
-        </p:nvSpPr>
-        <p:spPr>
-          <a:xfrm xmlns:a="http://schemas.openxmlformats.org/drawingml/2006/main">
-            <a:off x="1000125" y="2247900"/>
-            <a:ext cx="476250" cy="476250"/>
-          </a:xfrm>
-          <a:prstGeom xmlns:a="http://schemas.openxmlformats.org/drawingml/2006/main" prst="ellipse">
+                <a16:creationId xmlns:a16="http://schemas.microsoft.com/office/drawing/2014/main" id="{A902CA73-45E8-4753-B59C-4CAAD59FD73C}"/>
+              </a:ext>
+            </a:extLst>
+          </p:cNvPr>
+          <p:cNvSpPr>
+            <a:spLocks xmlns:a="http://schemas.openxmlformats.org/drawingml/2006/main" noGrp="1"/>
+          </p:cNvSpPr>
+          <p:nvPr/>
+        </p:nvSpPr>
+        <p:spPr>
+          <a:xfrm xmlns:a="http://schemas.openxmlformats.org/drawingml/2006/main">
+            <a:off x="971550" y="2124075"/>
+            <a:ext cx="38100" cy="3524250"/>
+          </a:xfrm>
+          <a:prstGeom xmlns:a="http://schemas.openxmlformats.org/drawingml/2006/main" prst="rect">
             <a:avLst/>
           </a:prstGeom>
           <a:solidFill xmlns:a="http://schemas.openxmlformats.org/drawingml/2006/main">
-            <a:srgbClr val="18324A"/>
+            <a:srgbClr val="2C6E73"/>
           </a:solidFill>
           <a:ln xmlns:a="http://schemas.openxmlformats.org/drawingml/2006/main" w="0">
-            <a:noFill/>
+            <a:solidFill>
+              <a:srgbClr val="2C6E73"/>
+            </a:solidFill>
           </a:ln>
         </p:spPr>
       </p:sp>
@@ -8297,19 +8299,19 @@
           <p:cNvPr id="12" name="">
             <a:extLst xmlns:a="http://schemas.openxmlformats.org/drawingml/2006/main">
               <a:ext uri="{FF2B5EF4-FFF2-40B4-BE49-F238E27FC236}">
-                <a16:creationId xmlns:a16="http://schemas.microsoft.com/office/drawing/2014/main" id="{1D608C47-9BDB-4028-9A97-4E65EDAAFB9E}"/>
-              </a:ext>
-            </a:extLst>
-          </p:cNvPr>
-          <p:cNvSpPr>
-            <a:spLocks xmlns:a="http://schemas.openxmlformats.org/drawingml/2006/main" noGrp="1"/>
-          </p:cNvSpPr>
-          <p:nvPr/>
-        </p:nvSpPr>
-        <p:spPr>
-          <a:xfrm xmlns:a="http://schemas.openxmlformats.org/drawingml/2006/main">
-            <a:off x="1000125" y="2276475"/>
-            <a:ext cx="476250" cy="419100"/>
+                <a16:creationId xmlns:a16="http://schemas.microsoft.com/office/drawing/2014/main" id="{10354F0C-8D9E-472A-83F1-D5F3FDAEFA2D}"/>
+              </a:ext>
+            </a:extLst>
+          </p:cNvPr>
+          <p:cNvSpPr>
+            <a:spLocks xmlns:a="http://schemas.openxmlformats.org/drawingml/2006/main" noGrp="1"/>
+          </p:cNvSpPr>
+          <p:nvPr/>
+        </p:nvSpPr>
+        <p:spPr>
+          <a:xfrm xmlns:a="http://schemas.openxmlformats.org/drawingml/2006/main">
+            <a:off x="1162050" y="2200275"/>
+            <a:ext cx="400050" cy="400050"/>
           </a:xfrm>
           <a:prstGeom xmlns:a="http://schemas.openxmlformats.org/drawingml/2006/main" prst="rect">
             <a:avLst/>
@@ -8326,9 +8328,9 @@
           <a:lstStyle xmlns:a="http://schemas.openxmlformats.org/drawingml/2006/main"/>
           <a:p xmlns:a="http://schemas.openxmlformats.org/drawingml/2006/main">
             <a:pPr algn="ctr">
-              <a:defRPr sz="1350" b="1">
-                <a:solidFill>
-                  <a:srgbClr val="FFFFFF"/>
+              <a:defRPr sz="1125" b="1">
+                <a:solidFill>
+                  <a:srgbClr val="2C6E73"/>
                 </a:solidFill>
                 <a:latin typeface="Arial"/>
                 <a:ea typeface="Arial"/>
@@ -8336,9 +8338,9 @@
               </a:defRPr>
             </a:pPr>
             <a:r>
-              <a:rPr sz="1350" b="1">
-                <a:solidFill>
-                  <a:srgbClr val="FFFFFF"/>
+              <a:rPr sz="1125" b="1">
+                <a:solidFill>
+                  <a:srgbClr val="2C6E73"/>
                 </a:solidFill>
                 <a:latin typeface="Arial"/>
                 <a:ea typeface="Arial"/>
@@ -8354,19 +8356,19 @@
           <p:cNvPr id="13" name="">
             <a:extLst xmlns:a="http://schemas.openxmlformats.org/drawingml/2006/main">
               <a:ext uri="{FF2B5EF4-FFF2-40B4-BE49-F238E27FC236}">
-                <a16:creationId xmlns:a16="http://schemas.microsoft.com/office/drawing/2014/main" id="{AA727E14-5464-4E98-A6C4-A51DA6217E77}"/>
-              </a:ext>
-            </a:extLst>
-          </p:cNvPr>
-          <p:cNvSpPr>
-            <a:spLocks xmlns:a="http://schemas.openxmlformats.org/drawingml/2006/main" noGrp="1"/>
-          </p:cNvSpPr>
-          <p:nvPr/>
-        </p:nvSpPr>
-        <p:spPr>
-          <a:xfrm xmlns:a="http://schemas.openxmlformats.org/drawingml/2006/main">
-            <a:off x="1714500" y="2181225"/>
-            <a:ext cx="9429750" cy="609600"/>
+                <a16:creationId xmlns:a16="http://schemas.microsoft.com/office/drawing/2014/main" id="{82087B7A-E6AE-49D3-A9D2-4AEB19C8AD6B}"/>
+              </a:ext>
+            </a:extLst>
+          </p:cNvPr>
+          <p:cNvSpPr>
+            <a:spLocks xmlns:a="http://schemas.openxmlformats.org/drawingml/2006/main" noGrp="1"/>
+          </p:cNvSpPr>
+          <p:nvPr/>
+        </p:nvSpPr>
+        <p:spPr>
+          <a:xfrm xmlns:a="http://schemas.openxmlformats.org/drawingml/2006/main">
+            <a:off x="1714500" y="2114550"/>
+            <a:ext cx="9525000" cy="809625"/>
           </a:xfrm>
           <a:prstGeom xmlns:a="http://schemas.openxmlformats.org/drawingml/2006/main" prst="rect">
             <a:avLst/>
@@ -8383,7 +8385,7 @@
           <a:lstStyle xmlns:a="http://schemas.openxmlformats.org/drawingml/2006/main"/>
           <a:p xmlns:a="http://schemas.openxmlformats.org/drawingml/2006/main">
             <a:pPr algn="l">
-              <a:defRPr sz="1500" b="0">
+              <a:defRPr sz="1725" b="0">
                 <a:solidFill>
                   <a:srgbClr val="17253A"/>
                 </a:solidFill>
@@ -8393,7 +8395,7 @@
               </a:defRPr>
             </a:pPr>
             <a:r>
-              <a:rPr sz="1500" b="0">
+              <a:rPr sz="1725" b="0">
                 <a:solidFill>
                   <a:srgbClr val="17253A"/>
                 </a:solidFill>
@@ -8401,7 +8403,7 @@
                 <a:ea typeface="Arial"/>
                 <a:cs typeface="Arial"/>
               </a:rPr>
-              <a:t>Identify the structure: Convert mixed numbers to improper fractions when needed.</a:t>
+              <a:t>2 1/2 × 3/4</a:t>
             </a:r>
           </a:p>
         </p:txBody>
@@ -8411,28 +8413,30 @@
           <p:cNvPr id="14" name="">
             <a:extLst xmlns:a="http://schemas.openxmlformats.org/drawingml/2006/main">
               <a:ext uri="{FF2B5EF4-FFF2-40B4-BE49-F238E27FC236}">
-                <a16:creationId xmlns:a16="http://schemas.microsoft.com/office/drawing/2014/main" id="{5E38F832-9E6A-48BE-B175-DFE169C297EA}"/>
-              </a:ext>
-            </a:extLst>
-          </p:cNvPr>
-          <p:cNvSpPr>
-            <a:spLocks xmlns:a="http://schemas.openxmlformats.org/drawingml/2006/main" noGrp="1"/>
-          </p:cNvSpPr>
-          <p:nvPr/>
-        </p:nvSpPr>
-        <p:spPr>
-          <a:xfrm xmlns:a="http://schemas.openxmlformats.org/drawingml/2006/main">
-            <a:off x="1000125" y="2990850"/>
-            <a:ext cx="476250" cy="476250"/>
-          </a:xfrm>
-          <a:prstGeom xmlns:a="http://schemas.openxmlformats.org/drawingml/2006/main" prst="ellipse">
+                <a16:creationId xmlns:a16="http://schemas.microsoft.com/office/drawing/2014/main" id="{82C3930B-9B43-4BA1-9B86-BD47B67A4A50}"/>
+              </a:ext>
+            </a:extLst>
+          </p:cNvPr>
+          <p:cNvSpPr>
+            <a:spLocks xmlns:a="http://schemas.openxmlformats.org/drawingml/2006/main" noGrp="1"/>
+          </p:cNvSpPr>
+          <p:nvPr/>
+        </p:nvSpPr>
+        <p:spPr>
+          <a:xfrm xmlns:a="http://schemas.openxmlformats.org/drawingml/2006/main">
+            <a:off x="1714500" y="2943225"/>
+            <a:ext cx="9334500" cy="9525"/>
+          </a:xfrm>
+          <a:prstGeom xmlns:a="http://schemas.openxmlformats.org/drawingml/2006/main" prst="rect">
             <a:avLst/>
           </a:prstGeom>
           <a:solidFill xmlns:a="http://schemas.openxmlformats.org/drawingml/2006/main">
-            <a:srgbClr val="2C6E73"/>
+            <a:srgbClr val="D9E0E6"/>
           </a:solidFill>
           <a:ln xmlns:a="http://schemas.openxmlformats.org/drawingml/2006/main" w="0">
-            <a:noFill/>
+            <a:solidFill>
+              <a:srgbClr val="D9E0E6"/>
+            </a:solidFill>
           </a:ln>
         </p:spPr>
       </p:sp>
@@ -8441,19 +8445,19 @@
           <p:cNvPr id="15" name="">
             <a:extLst xmlns:a="http://schemas.openxmlformats.org/drawingml/2006/main">
               <a:ext uri="{FF2B5EF4-FFF2-40B4-BE49-F238E27FC236}">
-                <a16:creationId xmlns:a16="http://schemas.microsoft.com/office/drawing/2014/main" id="{0371C3CC-627E-4AF7-8856-EC7868C5E342}"/>
-              </a:ext>
-            </a:extLst>
-          </p:cNvPr>
-          <p:cNvSpPr>
-            <a:spLocks xmlns:a="http://schemas.openxmlformats.org/drawingml/2006/main" noGrp="1"/>
-          </p:cNvSpPr>
-          <p:nvPr/>
-        </p:nvSpPr>
-        <p:spPr>
-          <a:xfrm xmlns:a="http://schemas.openxmlformats.org/drawingml/2006/main">
-            <a:off x="1000125" y="3019425"/>
-            <a:ext cx="476250" cy="419100"/>
+                <a16:creationId xmlns:a16="http://schemas.microsoft.com/office/drawing/2014/main" id="{32A0C9D1-7187-47CD-842C-C3AB79F32FD0}"/>
+              </a:ext>
+            </a:extLst>
+          </p:cNvPr>
+          <p:cNvSpPr>
+            <a:spLocks xmlns:a="http://schemas.openxmlformats.org/drawingml/2006/main" noGrp="1"/>
+          </p:cNvSpPr>
+          <p:nvPr/>
+        </p:nvSpPr>
+        <p:spPr>
+          <a:xfrm xmlns:a="http://schemas.openxmlformats.org/drawingml/2006/main">
+            <a:off x="1162050" y="3076575"/>
+            <a:ext cx="400050" cy="400050"/>
           </a:xfrm>
           <a:prstGeom xmlns:a="http://schemas.openxmlformats.org/drawingml/2006/main" prst="rect">
             <a:avLst/>
@@ -8470,9 +8474,9 @@
           <a:lstStyle xmlns:a="http://schemas.openxmlformats.org/drawingml/2006/main"/>
           <a:p xmlns:a="http://schemas.openxmlformats.org/drawingml/2006/main">
             <a:pPr algn="ctr">
-              <a:defRPr sz="1350" b="1">
-                <a:solidFill>
-                  <a:srgbClr val="FFFFFF"/>
+              <a:defRPr sz="1125" b="1">
+                <a:solidFill>
+                  <a:srgbClr val="2C6E73"/>
                 </a:solidFill>
                 <a:latin typeface="Arial"/>
                 <a:ea typeface="Arial"/>
@@ -8480,9 +8484,9 @@
               </a:defRPr>
             </a:pPr>
             <a:r>
-              <a:rPr sz="1350" b="1">
-                <a:solidFill>
-                  <a:srgbClr val="FFFFFF"/>
+              <a:rPr sz="1125" b="1">
+                <a:solidFill>
+                  <a:srgbClr val="2C6E73"/>
                 </a:solidFill>
                 <a:latin typeface="Arial"/>
                 <a:ea typeface="Arial"/>
@@ -8498,19 +8502,19 @@
           <p:cNvPr id="16" name="">
             <a:extLst xmlns:a="http://schemas.openxmlformats.org/drawingml/2006/main">
               <a:ext uri="{FF2B5EF4-FFF2-40B4-BE49-F238E27FC236}">
-                <a16:creationId xmlns:a16="http://schemas.microsoft.com/office/drawing/2014/main" id="{D59A777F-49EA-490C-8492-A4A87A20865E}"/>
-              </a:ext>
-            </a:extLst>
-          </p:cNvPr>
-          <p:cNvSpPr>
-            <a:spLocks xmlns:a="http://schemas.openxmlformats.org/drawingml/2006/main" noGrp="1"/>
-          </p:cNvSpPr>
-          <p:nvPr/>
-        </p:nvSpPr>
-        <p:spPr>
-          <a:xfrm xmlns:a="http://schemas.openxmlformats.org/drawingml/2006/main">
-            <a:off x="1714500" y="2924175"/>
-            <a:ext cx="9429750" cy="609600"/>
+                <a16:creationId xmlns:a16="http://schemas.microsoft.com/office/drawing/2014/main" id="{83C5CA50-0845-4704-8820-D7759709D841}"/>
+              </a:ext>
+            </a:extLst>
+          </p:cNvPr>
+          <p:cNvSpPr>
+            <a:spLocks xmlns:a="http://schemas.openxmlformats.org/drawingml/2006/main" noGrp="1"/>
+          </p:cNvSpPr>
+          <p:nvPr/>
+        </p:nvSpPr>
+        <p:spPr>
+          <a:xfrm xmlns:a="http://schemas.openxmlformats.org/drawingml/2006/main">
+            <a:off x="1714500" y="2990850"/>
+            <a:ext cx="9525000" cy="809625"/>
           </a:xfrm>
           <a:prstGeom xmlns:a="http://schemas.openxmlformats.org/drawingml/2006/main" prst="rect">
             <a:avLst/>
@@ -8527,7 +8531,7 @@
           <a:lstStyle xmlns:a="http://schemas.openxmlformats.org/drawingml/2006/main"/>
           <a:p xmlns:a="http://schemas.openxmlformats.org/drawingml/2006/main">
             <a:pPr algn="l">
-              <a:defRPr sz="1500" b="0">
+              <a:defRPr sz="1725" b="0">
                 <a:solidFill>
                   <a:srgbClr val="17253A"/>
                 </a:solidFill>
@@ -8537,7 +8541,7 @@
               </a:defRPr>
             </a:pPr>
             <a:r>
-              <a:rPr sz="1500" b="0">
+              <a:rPr sz="1725" b="0">
                 <a:solidFill>
                   <a:srgbClr val="17253A"/>
                 </a:solidFill>
@@ -8545,7 +8549,7 @@
                 <a:ea typeface="Arial"/>
                 <a:cs typeface="Arial"/>
               </a:rPr>
-              <a:t>Set up the method: Multiply numerators and denominators, cancelling common factors efficiently.</a:t>
+              <a:t>2 1/2 = 5/2</a:t>
             </a:r>
           </a:p>
         </p:txBody>
@@ -8555,28 +8559,30 @@
           <p:cNvPr id="17" name="">
             <a:extLst xmlns:a="http://schemas.openxmlformats.org/drawingml/2006/main">
               <a:ext uri="{FF2B5EF4-FFF2-40B4-BE49-F238E27FC236}">
-                <a16:creationId xmlns:a16="http://schemas.microsoft.com/office/drawing/2014/main" id="{6D355D70-4885-4008-98D9-693BDA136EE4}"/>
-              </a:ext>
-            </a:extLst>
-          </p:cNvPr>
-          <p:cNvSpPr>
-            <a:spLocks xmlns:a="http://schemas.openxmlformats.org/drawingml/2006/main" noGrp="1"/>
-          </p:cNvSpPr>
-          <p:nvPr/>
-        </p:nvSpPr>
-        <p:spPr>
-          <a:xfrm xmlns:a="http://schemas.openxmlformats.org/drawingml/2006/main">
-            <a:off x="1000125" y="3733800"/>
-            <a:ext cx="476250" cy="476250"/>
-          </a:xfrm>
-          <a:prstGeom xmlns:a="http://schemas.openxmlformats.org/drawingml/2006/main" prst="ellipse">
+                <a16:creationId xmlns:a16="http://schemas.microsoft.com/office/drawing/2014/main" id="{3F288CFA-AA1E-4F55-A196-DF43FD40EBBC}"/>
+              </a:ext>
+            </a:extLst>
+          </p:cNvPr>
+          <p:cNvSpPr>
+            <a:spLocks xmlns:a="http://schemas.openxmlformats.org/drawingml/2006/main" noGrp="1"/>
+          </p:cNvSpPr>
+          <p:nvPr/>
+        </p:nvSpPr>
+        <p:spPr>
+          <a:xfrm xmlns:a="http://schemas.openxmlformats.org/drawingml/2006/main">
+            <a:off x="1714500" y="3819525"/>
+            <a:ext cx="9334500" cy="9525"/>
+          </a:xfrm>
+          <a:prstGeom xmlns:a="http://schemas.openxmlformats.org/drawingml/2006/main" prst="rect">
             <a:avLst/>
           </a:prstGeom>
           <a:solidFill xmlns:a="http://schemas.openxmlformats.org/drawingml/2006/main">
-            <a:srgbClr val="2C6E73"/>
+            <a:srgbClr val="D9E0E6"/>
           </a:solidFill>
           <a:ln xmlns:a="http://schemas.openxmlformats.org/drawingml/2006/main" w="0">
-            <a:noFill/>
+            <a:solidFill>
+              <a:srgbClr val="D9E0E6"/>
+            </a:solidFill>
           </a:ln>
         </p:spPr>
       </p:sp>
@@ -8585,19 +8591,19 @@
           <p:cNvPr id="18" name="">
             <a:extLst xmlns:a="http://schemas.openxmlformats.org/drawingml/2006/main">
               <a:ext uri="{FF2B5EF4-FFF2-40B4-BE49-F238E27FC236}">
-                <a16:creationId xmlns:a16="http://schemas.microsoft.com/office/drawing/2014/main" id="{3E52912A-4E21-448C-A915-39CBDDDC565B}"/>
-              </a:ext>
-            </a:extLst>
-          </p:cNvPr>
-          <p:cNvSpPr>
-            <a:spLocks xmlns:a="http://schemas.openxmlformats.org/drawingml/2006/main" noGrp="1"/>
-          </p:cNvSpPr>
-          <p:nvPr/>
-        </p:nvSpPr>
-        <p:spPr>
-          <a:xfrm xmlns:a="http://schemas.openxmlformats.org/drawingml/2006/main">
-            <a:off x="1000125" y="3762375"/>
-            <a:ext cx="476250" cy="419100"/>
+                <a16:creationId xmlns:a16="http://schemas.microsoft.com/office/drawing/2014/main" id="{687662D7-F5F9-4D08-AEF2-94990E81E907}"/>
+              </a:ext>
+            </a:extLst>
+          </p:cNvPr>
+          <p:cNvSpPr>
+            <a:spLocks xmlns:a="http://schemas.openxmlformats.org/drawingml/2006/main" noGrp="1"/>
+          </p:cNvSpPr>
+          <p:nvPr/>
+        </p:nvSpPr>
+        <p:spPr>
+          <a:xfrm xmlns:a="http://schemas.openxmlformats.org/drawingml/2006/main">
+            <a:off x="1162050" y="3952875"/>
+            <a:ext cx="400050" cy="400050"/>
           </a:xfrm>
           <a:prstGeom xmlns:a="http://schemas.openxmlformats.org/drawingml/2006/main" prst="rect">
             <a:avLst/>
@@ -8614,9 +8620,9 @@
           <a:lstStyle xmlns:a="http://schemas.openxmlformats.org/drawingml/2006/main"/>
           <a:p xmlns:a="http://schemas.openxmlformats.org/drawingml/2006/main">
             <a:pPr algn="ctr">
-              <a:defRPr sz="1350" b="1">
-                <a:solidFill>
-                  <a:srgbClr val="FFFFFF"/>
+              <a:defRPr sz="1125" b="1">
+                <a:solidFill>
+                  <a:srgbClr val="2C6E73"/>
                 </a:solidFill>
                 <a:latin typeface="Arial"/>
                 <a:ea typeface="Arial"/>
@@ -8624,9 +8630,9 @@
               </a:defRPr>
             </a:pPr>
             <a:r>
-              <a:rPr sz="1350" b="1">
-                <a:solidFill>
-                  <a:srgbClr val="FFFFFF"/>
+              <a:rPr sz="1125" b="1">
+                <a:solidFill>
+                  <a:srgbClr val="2C6E73"/>
                 </a:solidFill>
                 <a:latin typeface="Arial"/>
                 <a:ea typeface="Arial"/>
@@ -8642,19 +8648,19 @@
           <p:cNvPr id="19" name="">
             <a:extLst xmlns:a="http://schemas.openxmlformats.org/drawingml/2006/main">
               <a:ext uri="{FF2B5EF4-FFF2-40B4-BE49-F238E27FC236}">
-                <a16:creationId xmlns:a16="http://schemas.microsoft.com/office/drawing/2014/main" id="{10439B67-5165-4ADE-96BB-34FC7EF7E764}"/>
-              </a:ext>
-            </a:extLst>
-          </p:cNvPr>
-          <p:cNvSpPr>
-            <a:spLocks xmlns:a="http://schemas.openxmlformats.org/drawingml/2006/main" noGrp="1"/>
-          </p:cNvSpPr>
-          <p:nvPr/>
-        </p:nvSpPr>
-        <p:spPr>
-          <a:xfrm xmlns:a="http://schemas.openxmlformats.org/drawingml/2006/main">
-            <a:off x="1714500" y="3667125"/>
-            <a:ext cx="9429750" cy="609600"/>
+                <a16:creationId xmlns:a16="http://schemas.microsoft.com/office/drawing/2014/main" id="{75A0968C-324A-4595-9D09-F11265A62CDD}"/>
+              </a:ext>
+            </a:extLst>
+          </p:cNvPr>
+          <p:cNvSpPr>
+            <a:spLocks xmlns:a="http://schemas.openxmlformats.org/drawingml/2006/main" noGrp="1"/>
+          </p:cNvSpPr>
+          <p:nvPr/>
+        </p:nvSpPr>
+        <p:spPr>
+          <a:xfrm xmlns:a="http://schemas.openxmlformats.org/drawingml/2006/main">
+            <a:off x="1714500" y="3867150"/>
+            <a:ext cx="9525000" cy="809625"/>
           </a:xfrm>
           <a:prstGeom xmlns:a="http://schemas.openxmlformats.org/drawingml/2006/main" prst="rect">
             <a:avLst/>
@@ -8671,7 +8677,7 @@
           <a:lstStyle xmlns:a="http://schemas.openxmlformats.org/drawingml/2006/main"/>
           <a:p xmlns:a="http://schemas.openxmlformats.org/drawingml/2006/main">
             <a:pPr algn="l">
-              <a:defRPr sz="1500" b="0">
+              <a:defRPr sz="1725" b="0">
                 <a:solidFill>
                   <a:srgbClr val="17253A"/>
                 </a:solidFill>
@@ -8681,7 +8687,7 @@
               </a:defRPr>
             </a:pPr>
             <a:r>
-              <a:rPr sz="1500" b="0">
+              <a:rPr sz="1725" b="0">
                 <a:solidFill>
                   <a:srgbClr val="17253A"/>
                 </a:solidFill>
@@ -8689,7 +8695,7 @@
                 <a:ea typeface="Arial"/>
                 <a:cs typeface="Arial"/>
               </a:rPr>
-              <a:t>Complete the calculation: 1 7/8.</a:t>
+              <a:t>5/2 × 3/4 = 15/8</a:t>
             </a:r>
           </a:p>
         </p:txBody>
@@ -8699,28 +8705,30 @@
           <p:cNvPr id="20" name="">
             <a:extLst xmlns:a="http://schemas.openxmlformats.org/drawingml/2006/main">
               <a:ext uri="{FF2B5EF4-FFF2-40B4-BE49-F238E27FC236}">
-                <a16:creationId xmlns:a16="http://schemas.microsoft.com/office/drawing/2014/main" id="{97E76CDF-926C-4956-B098-29E35C95B980}"/>
-              </a:ext>
-            </a:extLst>
-          </p:cNvPr>
-          <p:cNvSpPr>
-            <a:spLocks xmlns:a="http://schemas.openxmlformats.org/drawingml/2006/main" noGrp="1"/>
-          </p:cNvSpPr>
-          <p:nvPr/>
-        </p:nvSpPr>
-        <p:spPr>
-          <a:xfrm xmlns:a="http://schemas.openxmlformats.org/drawingml/2006/main">
-            <a:off x="1000125" y="4476750"/>
-            <a:ext cx="476250" cy="476250"/>
-          </a:xfrm>
-          <a:prstGeom xmlns:a="http://schemas.openxmlformats.org/drawingml/2006/main" prst="ellipse">
+                <a16:creationId xmlns:a16="http://schemas.microsoft.com/office/drawing/2014/main" id="{47ADDA88-2350-47D2-A084-C03871879947}"/>
+              </a:ext>
+            </a:extLst>
+          </p:cNvPr>
+          <p:cNvSpPr>
+            <a:spLocks xmlns:a="http://schemas.openxmlformats.org/drawingml/2006/main" noGrp="1"/>
+          </p:cNvSpPr>
+          <p:nvPr/>
+        </p:nvSpPr>
+        <p:spPr>
+          <a:xfrm xmlns:a="http://schemas.openxmlformats.org/drawingml/2006/main">
+            <a:off x="1714500" y="4695825"/>
+            <a:ext cx="9334500" cy="9525"/>
+          </a:xfrm>
+          <a:prstGeom xmlns:a="http://schemas.openxmlformats.org/drawingml/2006/main" prst="rect">
             <a:avLst/>
           </a:prstGeom>
           <a:solidFill xmlns:a="http://schemas.openxmlformats.org/drawingml/2006/main">
-            <a:srgbClr val="2C6E73"/>
+            <a:srgbClr val="D9E0E6"/>
           </a:solidFill>
           <a:ln xmlns:a="http://schemas.openxmlformats.org/drawingml/2006/main" w="0">
-            <a:noFill/>
+            <a:solidFill>
+              <a:srgbClr val="D9E0E6"/>
+            </a:solidFill>
           </a:ln>
         </p:spPr>
       </p:sp>
@@ -8729,19 +8737,19 @@
           <p:cNvPr id="21" name="">
             <a:extLst xmlns:a="http://schemas.openxmlformats.org/drawingml/2006/main">
               <a:ext uri="{FF2B5EF4-FFF2-40B4-BE49-F238E27FC236}">
-                <a16:creationId xmlns:a16="http://schemas.microsoft.com/office/drawing/2014/main" id="{DEB14448-B32B-4747-983F-8EFFAA19C1BB}"/>
-              </a:ext>
-            </a:extLst>
-          </p:cNvPr>
-          <p:cNvSpPr>
-            <a:spLocks xmlns:a="http://schemas.openxmlformats.org/drawingml/2006/main" noGrp="1"/>
-          </p:cNvSpPr>
-          <p:nvPr/>
-        </p:nvSpPr>
-        <p:spPr>
-          <a:xfrm xmlns:a="http://schemas.openxmlformats.org/drawingml/2006/main">
-            <a:off x="1000125" y="4505325"/>
-            <a:ext cx="476250" cy="419100"/>
+                <a16:creationId xmlns:a16="http://schemas.microsoft.com/office/drawing/2014/main" id="{2804EDA3-49CE-4AAC-A672-EBA83F1C1522}"/>
+              </a:ext>
+            </a:extLst>
+          </p:cNvPr>
+          <p:cNvSpPr>
+            <a:spLocks xmlns:a="http://schemas.openxmlformats.org/drawingml/2006/main" noGrp="1"/>
+          </p:cNvSpPr>
+          <p:nvPr/>
+        </p:nvSpPr>
+        <p:spPr>
+          <a:xfrm xmlns:a="http://schemas.openxmlformats.org/drawingml/2006/main">
+            <a:off x="1162050" y="4829175"/>
+            <a:ext cx="400050" cy="400050"/>
           </a:xfrm>
           <a:prstGeom xmlns:a="http://schemas.openxmlformats.org/drawingml/2006/main" prst="rect">
             <a:avLst/>
@@ -8758,9 +8766,9 @@
           <a:lstStyle xmlns:a="http://schemas.openxmlformats.org/drawingml/2006/main"/>
           <a:p xmlns:a="http://schemas.openxmlformats.org/drawingml/2006/main">
             <a:pPr algn="ctr">
-              <a:defRPr sz="1350" b="1">
-                <a:solidFill>
-                  <a:srgbClr val="FFFFFF"/>
+              <a:defRPr sz="1125" b="1">
+                <a:solidFill>
+                  <a:srgbClr val="2F785D"/>
                 </a:solidFill>
                 <a:latin typeface="Arial"/>
                 <a:ea typeface="Arial"/>
@@ -8768,9 +8776,9 @@
               </a:defRPr>
             </a:pPr>
             <a:r>
-              <a:rPr sz="1350" b="1">
-                <a:solidFill>
-                  <a:srgbClr val="FFFFFF"/>
+              <a:rPr sz="1125" b="1">
+                <a:solidFill>
+                  <a:srgbClr val="2F785D"/>
                 </a:solidFill>
                 <a:latin typeface="Arial"/>
                 <a:ea typeface="Arial"/>
@@ -8786,19 +8794,19 @@
           <p:cNvPr id="22" name="">
             <a:extLst xmlns:a="http://schemas.openxmlformats.org/drawingml/2006/main">
               <a:ext uri="{FF2B5EF4-FFF2-40B4-BE49-F238E27FC236}">
-                <a16:creationId xmlns:a16="http://schemas.microsoft.com/office/drawing/2014/main" id="{4D90CFC2-793F-4E7B-8E60-90792DBB4672}"/>
-              </a:ext>
-            </a:extLst>
-          </p:cNvPr>
-          <p:cNvSpPr>
-            <a:spLocks xmlns:a="http://schemas.openxmlformats.org/drawingml/2006/main" noGrp="1"/>
-          </p:cNvSpPr>
-          <p:nvPr/>
-        </p:nvSpPr>
-        <p:spPr>
-          <a:xfrm xmlns:a="http://schemas.openxmlformats.org/drawingml/2006/main">
-            <a:off x="1714500" y="4410075"/>
-            <a:ext cx="9429750" cy="609600"/>
+                <a16:creationId xmlns:a16="http://schemas.microsoft.com/office/drawing/2014/main" id="{0873F535-26C2-4763-8F68-9AFE02C708CC}"/>
+              </a:ext>
+            </a:extLst>
+          </p:cNvPr>
+          <p:cNvSpPr>
+            <a:spLocks xmlns:a="http://schemas.openxmlformats.org/drawingml/2006/main" noGrp="1"/>
+          </p:cNvSpPr>
+          <p:nvPr/>
+        </p:nvSpPr>
+        <p:spPr>
+          <a:xfrm xmlns:a="http://schemas.openxmlformats.org/drawingml/2006/main">
+            <a:off x="1714500" y="4743450"/>
+            <a:ext cx="9525000" cy="809625"/>
           </a:xfrm>
           <a:prstGeom xmlns:a="http://schemas.openxmlformats.org/drawingml/2006/main" prst="rect">
             <a:avLst/>
@@ -8815,7 +8823,7 @@
           <a:lstStyle xmlns:a="http://schemas.openxmlformats.org/drawingml/2006/main"/>
           <a:p xmlns:a="http://schemas.openxmlformats.org/drawingml/2006/main">
             <a:pPr algn="l">
-              <a:defRPr sz="1500" b="1">
+              <a:defRPr sz="1725" b="1">
                 <a:solidFill>
                   <a:srgbClr val="2F785D"/>
                 </a:solidFill>
@@ -8825,7 +8833,7 @@
               </a:defRPr>
             </a:pPr>
             <a:r>
-              <a:rPr sz="1500" b="1">
+              <a:rPr sz="1725" b="1">
                 <a:solidFill>
                   <a:srgbClr val="2F785D"/>
                 </a:solidFill>
@@ -8833,7 +8841,7 @@
                 <a:ea typeface="Arial"/>
                 <a:cs typeface="Arial"/>
               </a:rPr>
-              <a:t>Check the result: Simplify the product and check its size.</a:t>
+              <a:t>15/8 = 1 7/8</a:t>
             </a:r>
           </a:p>
         </p:txBody>
@@ -8841,7 +8849,7 @@
     </p:spTree>
     <p:extLst>
       <p:ext uri="{BB962C8B-B14F-4D97-AF65-F5344CB8AC3E}">
-        <p14:creationId xmlns:p14="http://schemas.microsoft.com/office/powerpoint/2010/main" val="1429959633"/>
+        <p14:creationId xmlns:p14="http://schemas.microsoft.com/office/powerpoint/2010/main" val="624442022"/>
       </p:ext>
     </p:extLst>
   </p:cSld>
@@ -9134,7 +9142,7 @@
           <p:cNvPr id="15" name="">
             <a:extLst xmlns:a="http://schemas.openxmlformats.org/drawingml/2006/main">
               <a:ext uri="{FF2B5EF4-FFF2-40B4-BE49-F238E27FC236}">
-                <a16:creationId xmlns:a16="http://schemas.microsoft.com/office/drawing/2014/main" id="{EFD33EA1-7074-4432-8B5D-88E194421D42}"/>
+                <a16:creationId xmlns:a16="http://schemas.microsoft.com/office/drawing/2014/main" id="{5ECCB2B2-6679-46AD-854F-9D9E43C4F941}"/>
               </a:ext>
             </a:extLst>
           </p:cNvPr>
@@ -9166,7 +9174,7 @@
           <p:cNvPr id="2" name="">
             <a:extLst xmlns:a="http://schemas.openxmlformats.org/drawingml/2006/main">
               <a:ext uri="{FF2B5EF4-FFF2-40B4-BE49-F238E27FC236}">
-                <a16:creationId xmlns:a16="http://schemas.microsoft.com/office/drawing/2014/main" id="{9F5DC4D9-CBDA-4904-8347-F085478782F2}"/>
+                <a16:creationId xmlns:a16="http://schemas.microsoft.com/office/drawing/2014/main" id="{17CFF743-A9E6-47CB-8D4B-B7DE512F52D6}"/>
               </a:ext>
             </a:extLst>
           </p:cNvPr>
@@ -9223,7 +9231,7 @@
           <p:cNvPr id="3" name="">
             <a:extLst xmlns:a="http://schemas.openxmlformats.org/drawingml/2006/main">
               <a:ext uri="{FF2B5EF4-FFF2-40B4-BE49-F238E27FC236}">
-                <a16:creationId xmlns:a16="http://schemas.microsoft.com/office/drawing/2014/main" id="{206F5509-2966-414A-9418-2C13DDF3B515}"/>
+                <a16:creationId xmlns:a16="http://schemas.microsoft.com/office/drawing/2014/main" id="{37D73BFC-70DE-4FA7-978B-23B0B565A610}"/>
               </a:ext>
             </a:extLst>
           </p:cNvPr>
@@ -9255,7 +9263,7 @@
           <p:cNvPr id="4" name="">
             <a:extLst xmlns:a="http://schemas.openxmlformats.org/drawingml/2006/main">
               <a:ext uri="{FF2B5EF4-FFF2-40B4-BE49-F238E27FC236}">
-                <a16:creationId xmlns:a16="http://schemas.microsoft.com/office/drawing/2014/main" id="{2E071BA8-06A8-415D-9B67-179DD99A45FC}"/>
+                <a16:creationId xmlns:a16="http://schemas.microsoft.com/office/drawing/2014/main" id="{0F5D6B78-F3AB-4A82-B64A-2F2B5E9E7369}"/>
               </a:ext>
             </a:extLst>
           </p:cNvPr>
@@ -9312,7 +9320,7 @@
           <p:cNvPr id="5" name="">
             <a:extLst xmlns:a="http://schemas.openxmlformats.org/drawingml/2006/main">
               <a:ext uri="{FF2B5EF4-FFF2-40B4-BE49-F238E27FC236}">
-                <a16:creationId xmlns:a16="http://schemas.microsoft.com/office/drawing/2014/main" id="{6F96621F-297E-47F9-8432-7C1D47093DBC}"/>
+                <a16:creationId xmlns:a16="http://schemas.microsoft.com/office/drawing/2014/main" id="{AE14C289-D6EC-46F8-9BE0-BD927D7395FC}"/>
               </a:ext>
             </a:extLst>
           </p:cNvPr>
@@ -9369,7 +9377,7 @@
           <p:cNvPr id="6" name="">
             <a:extLst xmlns:a="http://schemas.openxmlformats.org/drawingml/2006/main">
               <a:ext uri="{FF2B5EF4-FFF2-40B4-BE49-F238E27FC236}">
-                <a16:creationId xmlns:a16="http://schemas.microsoft.com/office/drawing/2014/main" id="{08EDB767-0A62-4AF1-A45A-18011E6B1AF2}"/>
+                <a16:creationId xmlns:a16="http://schemas.microsoft.com/office/drawing/2014/main" id="{595332A9-E446-4921-B6E5-2582CE524D6C}"/>
               </a:ext>
             </a:extLst>
           </p:cNvPr>
@@ -9426,7 +9434,7 @@
           <p:cNvPr id="7" name="">
             <a:extLst xmlns:a="http://schemas.openxmlformats.org/drawingml/2006/main">
               <a:ext uri="{FF2B5EF4-FFF2-40B4-BE49-F238E27FC236}">
-                <a16:creationId xmlns:a16="http://schemas.microsoft.com/office/drawing/2014/main" id="{C624003A-82DD-42B3-8971-304AAE1E0602}"/>
+                <a16:creationId xmlns:a16="http://schemas.microsoft.com/office/drawing/2014/main" id="{D7E868CB-6B9B-4B8A-B996-28598BF4B4A0}"/>
               </a:ext>
             </a:extLst>
           </p:cNvPr>
@@ -9458,7 +9466,7 @@
           <p:cNvPr id="8" name="">
             <a:extLst xmlns:a="http://schemas.openxmlformats.org/drawingml/2006/main">
               <a:ext uri="{FF2B5EF4-FFF2-40B4-BE49-F238E27FC236}">
-                <a16:creationId xmlns:a16="http://schemas.microsoft.com/office/drawing/2014/main" id="{66D4910E-1006-4374-A7D9-BFB9EB04315F}"/>
+                <a16:creationId xmlns:a16="http://schemas.microsoft.com/office/drawing/2014/main" id="{369CE33B-882C-4582-A8A7-8C7C4D61863E}"/>
               </a:ext>
             </a:extLst>
           </p:cNvPr>
@@ -9515,7 +9523,7 @@
           <p:cNvPr id="9" name="">
             <a:extLst xmlns:a="http://schemas.openxmlformats.org/drawingml/2006/main">
               <a:ext uri="{FF2B5EF4-FFF2-40B4-BE49-F238E27FC236}">
-                <a16:creationId xmlns:a16="http://schemas.microsoft.com/office/drawing/2014/main" id="{5BC2A358-AB8D-4508-BFC4-941E49D50F90}"/>
+                <a16:creationId xmlns:a16="http://schemas.microsoft.com/office/drawing/2014/main" id="{A6B50230-8481-4830-A9BC-B57D0FA45E43}"/>
               </a:ext>
             </a:extLst>
           </p:cNvPr>
@@ -9572,7 +9580,7 @@
           <p:cNvPr id="10" name="">
             <a:extLst xmlns:a="http://schemas.openxmlformats.org/drawingml/2006/main">
               <a:ext uri="{FF2B5EF4-FFF2-40B4-BE49-F238E27FC236}">
-                <a16:creationId xmlns:a16="http://schemas.microsoft.com/office/drawing/2014/main" id="{96552F92-9E16-4321-972B-69E21CC848EC}"/>
+                <a16:creationId xmlns:a16="http://schemas.microsoft.com/office/drawing/2014/main" id="{1EB42FFA-D6AF-4861-8B30-E6FFAD22C92E}"/>
               </a:ext>
             </a:extLst>
           </p:cNvPr>
@@ -9629,7 +9637,7 @@
           <p:cNvPr id="11" name="">
             <a:extLst xmlns:a="http://schemas.openxmlformats.org/drawingml/2006/main">
               <a:ext uri="{FF2B5EF4-FFF2-40B4-BE49-F238E27FC236}">
-                <a16:creationId xmlns:a16="http://schemas.microsoft.com/office/drawing/2014/main" id="{994CCE0B-ADD9-4F31-9BFE-F137D3EBE0E3}"/>
+                <a16:creationId xmlns:a16="http://schemas.microsoft.com/office/drawing/2014/main" id="{26ACB39F-E24B-4D9F-B654-05250794449B}"/>
               </a:ext>
             </a:extLst>
           </p:cNvPr>
@@ -9686,7 +9694,7 @@
           <p:cNvPr id="12" name="">
             <a:extLst xmlns:a="http://schemas.openxmlformats.org/drawingml/2006/main">
               <a:ext uri="{FF2B5EF4-FFF2-40B4-BE49-F238E27FC236}">
-                <a16:creationId xmlns:a16="http://schemas.microsoft.com/office/drawing/2014/main" id="{36BB8F37-B75B-48C9-B26D-BC3746D49513}"/>
+                <a16:creationId xmlns:a16="http://schemas.microsoft.com/office/drawing/2014/main" id="{CB37D010-6864-4923-8CD0-49B64AC39010}"/>
               </a:ext>
             </a:extLst>
           </p:cNvPr>
@@ -9718,7 +9726,7 @@
           <p:cNvPr id="13" name="">
             <a:extLst xmlns:a="http://schemas.openxmlformats.org/drawingml/2006/main">
               <a:ext uri="{FF2B5EF4-FFF2-40B4-BE49-F238E27FC236}">
-                <a16:creationId xmlns:a16="http://schemas.microsoft.com/office/drawing/2014/main" id="{A4ABF86A-55BB-48E1-A02B-892D7382F906}"/>
+                <a16:creationId xmlns:a16="http://schemas.microsoft.com/office/drawing/2014/main" id="{858C44E7-DDF3-4D1C-B1EF-7D3A3F0AC551}"/>
               </a:ext>
             </a:extLst>
           </p:cNvPr>
@@ -9775,7 +9783,7 @@
           <p:cNvPr id="14" name="">
             <a:extLst xmlns:a="http://schemas.openxmlformats.org/drawingml/2006/main">
               <a:ext uri="{FF2B5EF4-FFF2-40B4-BE49-F238E27FC236}">
-                <a16:creationId xmlns:a16="http://schemas.microsoft.com/office/drawing/2014/main" id="{3E205FD2-015E-4CAA-B2A5-CA0ED5B5A951}"/>
+                <a16:creationId xmlns:a16="http://schemas.microsoft.com/office/drawing/2014/main" id="{7776E1C5-0B0E-4BCC-BAFC-A7F43900C2BC}"/>
               </a:ext>
             </a:extLst>
           </p:cNvPr>
@@ -9830,7 +9838,7 @@
     </p:spTree>
     <p:extLst>
       <p:ext uri="{BB962C8B-B14F-4D97-AF65-F5344CB8AC3E}">
-        <p14:creationId xmlns:p14="http://schemas.microsoft.com/office/powerpoint/2010/main" val="891553406"/>
+        <p14:creationId xmlns:p14="http://schemas.microsoft.com/office/powerpoint/2010/main" val="1222978959"/>
       </p:ext>
     </p:extLst>
   </p:cSld>
@@ -10031,7 +10039,7 @@
           <p:cNvPr id="16" name="">
             <a:extLst xmlns:a="http://schemas.openxmlformats.org/drawingml/2006/main">
               <a:ext uri="{FF2B5EF4-FFF2-40B4-BE49-F238E27FC236}">
-                <a16:creationId xmlns:a16="http://schemas.microsoft.com/office/drawing/2014/main" id="{FAB21001-0727-402E-8B4A-C143F700B3A9}"/>
+                <a16:creationId xmlns:a16="http://schemas.microsoft.com/office/drawing/2014/main" id="{D72CA684-3FAC-447F-8C88-47B2E0500B76}"/>
               </a:ext>
             </a:extLst>
           </p:cNvPr>
@@ -10063,7 +10071,7 @@
           <p:cNvPr id="2" name="">
             <a:extLst xmlns:a="http://schemas.openxmlformats.org/drawingml/2006/main">
               <a:ext uri="{FF2B5EF4-FFF2-40B4-BE49-F238E27FC236}">
-                <a16:creationId xmlns:a16="http://schemas.microsoft.com/office/drawing/2014/main" id="{BCA21505-DBB9-4A76-A11E-FAA6D0D72811}"/>
+                <a16:creationId xmlns:a16="http://schemas.microsoft.com/office/drawing/2014/main" id="{8B586809-7B85-4FC2-8FD8-18BDE20E17BC}"/>
               </a:ext>
             </a:extLst>
           </p:cNvPr>
@@ -10120,7 +10128,7 @@
           <p:cNvPr id="3" name="">
             <a:extLst xmlns:a="http://schemas.openxmlformats.org/drawingml/2006/main">
               <a:ext uri="{FF2B5EF4-FFF2-40B4-BE49-F238E27FC236}">
-                <a16:creationId xmlns:a16="http://schemas.microsoft.com/office/drawing/2014/main" id="{E5244C0F-C1CC-40C7-9722-C25F60DAF878}"/>
+                <a16:creationId xmlns:a16="http://schemas.microsoft.com/office/drawing/2014/main" id="{0D0DABED-F8F9-45E1-B859-8F2C30106832}"/>
               </a:ext>
             </a:extLst>
           </p:cNvPr>
@@ -10152,7 +10160,7 @@
           <p:cNvPr id="4" name="">
             <a:extLst xmlns:a="http://schemas.openxmlformats.org/drawingml/2006/main">
               <a:ext uri="{FF2B5EF4-FFF2-40B4-BE49-F238E27FC236}">
-                <a16:creationId xmlns:a16="http://schemas.microsoft.com/office/drawing/2014/main" id="{16C0BA2B-74C6-40E5-84D4-12D91A12D013}"/>
+                <a16:creationId xmlns:a16="http://schemas.microsoft.com/office/drawing/2014/main" id="{D7086EDA-61CC-42D3-8F7B-4F67D7DF79AF}"/>
               </a:ext>
             </a:extLst>
           </p:cNvPr>
@@ -10209,7 +10217,7 @@
           <p:cNvPr id="5" name="">
             <a:extLst xmlns:a="http://schemas.openxmlformats.org/drawingml/2006/main">
               <a:ext uri="{FF2B5EF4-FFF2-40B4-BE49-F238E27FC236}">
-                <a16:creationId xmlns:a16="http://schemas.microsoft.com/office/drawing/2014/main" id="{7C4344B2-916A-4EFB-BC7F-11941F4F0E3E}"/>
+                <a16:creationId xmlns:a16="http://schemas.microsoft.com/office/drawing/2014/main" id="{62299A5F-5F10-4EED-AEF0-2BE053AF9322}"/>
               </a:ext>
             </a:extLst>
           </p:cNvPr>
@@ -10266,7 +10274,7 @@
           <p:cNvPr id="6" name="">
             <a:extLst xmlns:a="http://schemas.openxmlformats.org/drawingml/2006/main">
               <a:ext uri="{FF2B5EF4-FFF2-40B4-BE49-F238E27FC236}">
-                <a16:creationId xmlns:a16="http://schemas.microsoft.com/office/drawing/2014/main" id="{9B9999F7-6EFB-4682-B1CF-A62D1579EAE3}"/>
+                <a16:creationId xmlns:a16="http://schemas.microsoft.com/office/drawing/2014/main" id="{91DA3E5F-624D-40AE-8B30-D74E10A28BB4}"/>
               </a:ext>
             </a:extLst>
           </p:cNvPr>
@@ -10323,7 +10331,7 @@
           <p:cNvPr id="7" name="">
             <a:extLst xmlns:a="http://schemas.openxmlformats.org/drawingml/2006/main">
               <a:ext uri="{FF2B5EF4-FFF2-40B4-BE49-F238E27FC236}">
-                <a16:creationId xmlns:a16="http://schemas.microsoft.com/office/drawing/2014/main" id="{0DEFE355-D2DB-439B-810A-97EB5B0BB483}"/>
+                <a16:creationId xmlns:a16="http://schemas.microsoft.com/office/drawing/2014/main" id="{DA60749E-C6E9-4F51-8DCF-E85052D9472F}"/>
               </a:ext>
             </a:extLst>
           </p:cNvPr>
@@ -10355,7 +10363,7 @@
           <p:cNvPr id="8" name="">
             <a:extLst xmlns:a="http://schemas.openxmlformats.org/drawingml/2006/main">
               <a:ext uri="{FF2B5EF4-FFF2-40B4-BE49-F238E27FC236}">
-                <a16:creationId xmlns:a16="http://schemas.microsoft.com/office/drawing/2014/main" id="{3782E109-580E-48D5-B919-464376F3B512}"/>
+                <a16:creationId xmlns:a16="http://schemas.microsoft.com/office/drawing/2014/main" id="{748CE586-21A4-480E-A201-013AC4D421EF}"/>
               </a:ext>
             </a:extLst>
           </p:cNvPr>
@@ -10412,7 +10420,7 @@
           <p:cNvPr id="9" name="">
             <a:extLst xmlns:a="http://schemas.openxmlformats.org/drawingml/2006/main">
               <a:ext uri="{FF2B5EF4-FFF2-40B4-BE49-F238E27FC236}">
-                <a16:creationId xmlns:a16="http://schemas.microsoft.com/office/drawing/2014/main" id="{D28AB556-617E-499A-8BBF-D9A02BE7C00C}"/>
+                <a16:creationId xmlns:a16="http://schemas.microsoft.com/office/drawing/2014/main" id="{441B3BF3-22FD-41F3-A792-D64F9F8080DB}"/>
               </a:ext>
             </a:extLst>
           </p:cNvPr>
@@ -10469,7 +10477,7 @@
           <p:cNvPr id="10" name="">
             <a:extLst xmlns:a="http://schemas.openxmlformats.org/drawingml/2006/main">
               <a:ext uri="{FF2B5EF4-FFF2-40B4-BE49-F238E27FC236}">
-                <a16:creationId xmlns:a16="http://schemas.microsoft.com/office/drawing/2014/main" id="{CD8CF562-CE04-410E-B002-2D57390F59F6}"/>
+                <a16:creationId xmlns:a16="http://schemas.microsoft.com/office/drawing/2014/main" id="{E759699B-2DE5-4EFA-AD02-5CF073F9817B}"/>
               </a:ext>
             </a:extLst>
           </p:cNvPr>
@@ -10526,7 +10534,7 @@
           <p:cNvPr id="11" name="">
             <a:extLst xmlns:a="http://schemas.openxmlformats.org/drawingml/2006/main">
               <a:ext uri="{FF2B5EF4-FFF2-40B4-BE49-F238E27FC236}">
-                <a16:creationId xmlns:a16="http://schemas.microsoft.com/office/drawing/2014/main" id="{294C5FBF-97FA-4FE1-A837-4921FCDE0450}"/>
+                <a16:creationId xmlns:a16="http://schemas.microsoft.com/office/drawing/2014/main" id="{1FCADC8A-1561-45E6-86E9-F3A80E21F2E8}"/>
               </a:ext>
             </a:extLst>
           </p:cNvPr>
@@ -10583,7 +10591,7 @@
           <p:cNvPr id="12" name="">
             <a:extLst xmlns:a="http://schemas.openxmlformats.org/drawingml/2006/main">
               <a:ext uri="{FF2B5EF4-FFF2-40B4-BE49-F238E27FC236}">
-                <a16:creationId xmlns:a16="http://schemas.microsoft.com/office/drawing/2014/main" id="{0366FA45-318A-4F61-B915-C933DD612C82}"/>
+                <a16:creationId xmlns:a16="http://schemas.microsoft.com/office/drawing/2014/main" id="{6258E083-C677-4635-BD27-4EFDBA4FECF0}"/>
               </a:ext>
             </a:extLst>
           </p:cNvPr>
@@ -10640,7 +10648,7 @@
           <p:cNvPr id="13" name="">
             <a:extLst xmlns:a="http://schemas.openxmlformats.org/drawingml/2006/main">
               <a:ext uri="{FF2B5EF4-FFF2-40B4-BE49-F238E27FC236}">
-                <a16:creationId xmlns:a16="http://schemas.microsoft.com/office/drawing/2014/main" id="{75955902-BDC5-4A07-BDB7-9E17C1251C60}"/>
+                <a16:creationId xmlns:a16="http://schemas.microsoft.com/office/drawing/2014/main" id="{34CC8E45-AB9C-401A-975A-70C2DC813837}"/>
               </a:ext>
             </a:extLst>
           </p:cNvPr>
@@ -10697,7 +10705,7 @@
           <p:cNvPr id="14" name="">
             <a:extLst xmlns:a="http://schemas.openxmlformats.org/drawingml/2006/main">
               <a:ext uri="{FF2B5EF4-FFF2-40B4-BE49-F238E27FC236}">
-                <a16:creationId xmlns:a16="http://schemas.microsoft.com/office/drawing/2014/main" id="{D3E4C985-F762-4FF0-BE09-A2CACDBB40B7}"/>
+                <a16:creationId xmlns:a16="http://schemas.microsoft.com/office/drawing/2014/main" id="{C0EECD7E-D99E-4CB5-B4F3-95113163AD52}"/>
               </a:ext>
             </a:extLst>
           </p:cNvPr>
@@ -10754,7 +10762,7 @@
           <p:cNvPr id="15" name="">
             <a:extLst xmlns:a="http://schemas.openxmlformats.org/drawingml/2006/main">
               <a:ext uri="{FF2B5EF4-FFF2-40B4-BE49-F238E27FC236}">
-                <a16:creationId xmlns:a16="http://schemas.microsoft.com/office/drawing/2014/main" id="{3C358B8A-2BDC-4065-B87F-5BBF8A7A3A4E}"/>
+                <a16:creationId xmlns:a16="http://schemas.microsoft.com/office/drawing/2014/main" id="{186D5515-9518-4FD3-AC66-3C8D9C441775}"/>
               </a:ext>
             </a:extLst>
           </p:cNvPr>
@@ -10809,7 +10817,7 @@
     </p:spTree>
     <p:extLst>
       <p:ext uri="{BB962C8B-B14F-4D97-AF65-F5344CB8AC3E}">
-        <p14:creationId xmlns:p14="http://schemas.microsoft.com/office/powerpoint/2010/main" val="244539100"/>
+        <p14:creationId xmlns:p14="http://schemas.microsoft.com/office/powerpoint/2010/main" val="765673088"/>
       </p:ext>
     </p:extLst>
   </p:cSld>
@@ -10964,7 +10972,7 @@
           <p:cNvPr id="16" name="">
             <a:extLst xmlns:a="http://schemas.openxmlformats.org/drawingml/2006/main">
               <a:ext uri="{FF2B5EF4-FFF2-40B4-BE49-F238E27FC236}">
-                <a16:creationId xmlns:a16="http://schemas.microsoft.com/office/drawing/2014/main" id="{7BDD1790-1791-4A14-8D58-110FD6923638}"/>
+                <a16:creationId xmlns:a16="http://schemas.microsoft.com/office/drawing/2014/main" id="{FECA4EFE-A0B0-4183-9B06-6C62323DEC0A}"/>
               </a:ext>
             </a:extLst>
           </p:cNvPr>
@@ -10996,7 +11004,7 @@
           <p:cNvPr id="2" name="">
             <a:extLst xmlns:a="http://schemas.openxmlformats.org/drawingml/2006/main">
               <a:ext uri="{FF2B5EF4-FFF2-40B4-BE49-F238E27FC236}">
-                <a16:creationId xmlns:a16="http://schemas.microsoft.com/office/drawing/2014/main" id="{0B37617B-E232-4C2B-945F-82960AF78864}"/>
+                <a16:creationId xmlns:a16="http://schemas.microsoft.com/office/drawing/2014/main" id="{47ED5DC4-527D-4B1A-B181-9DBC2451E4F0}"/>
               </a:ext>
             </a:extLst>
           </p:cNvPr>
@@ -11053,7 +11061,7 @@
           <p:cNvPr id="3" name="">
             <a:extLst xmlns:a="http://schemas.openxmlformats.org/drawingml/2006/main">
               <a:ext uri="{FF2B5EF4-FFF2-40B4-BE49-F238E27FC236}">
-                <a16:creationId xmlns:a16="http://schemas.microsoft.com/office/drawing/2014/main" id="{05633E34-6634-4F41-BA95-8D7F972AF51A}"/>
+                <a16:creationId xmlns:a16="http://schemas.microsoft.com/office/drawing/2014/main" id="{CE9A3B78-215D-4ECF-94E2-2076C799DFD7}"/>
               </a:ext>
             </a:extLst>
           </p:cNvPr>
@@ -11085,7 +11093,7 @@
           <p:cNvPr id="4" name="">
             <a:extLst xmlns:a="http://schemas.openxmlformats.org/drawingml/2006/main">
               <a:ext uri="{FF2B5EF4-FFF2-40B4-BE49-F238E27FC236}">
-                <a16:creationId xmlns:a16="http://schemas.microsoft.com/office/drawing/2014/main" id="{F74AD72C-9C46-4F72-A13A-3A30AA3B8254}"/>
+                <a16:creationId xmlns:a16="http://schemas.microsoft.com/office/drawing/2014/main" id="{4DF0D94A-608C-4330-B10F-5F760D8423A5}"/>
               </a:ext>
             </a:extLst>
           </p:cNvPr>
@@ -11142,7 +11150,7 @@
           <p:cNvPr id="5" name="">
             <a:extLst xmlns:a="http://schemas.openxmlformats.org/drawingml/2006/main">
               <a:ext uri="{FF2B5EF4-FFF2-40B4-BE49-F238E27FC236}">
-                <a16:creationId xmlns:a16="http://schemas.microsoft.com/office/drawing/2014/main" id="{23EF9BE9-9021-4C78-AB61-9931D5F6DB23}"/>
+                <a16:creationId xmlns:a16="http://schemas.microsoft.com/office/drawing/2014/main" id="{27AAA066-4045-411A-9E99-0549E16EA901}"/>
               </a:ext>
             </a:extLst>
           </p:cNvPr>
@@ -11199,7 +11207,7 @@
           <p:cNvPr id="6" name="">
             <a:extLst xmlns:a="http://schemas.openxmlformats.org/drawingml/2006/main">
               <a:ext uri="{FF2B5EF4-FFF2-40B4-BE49-F238E27FC236}">
-                <a16:creationId xmlns:a16="http://schemas.microsoft.com/office/drawing/2014/main" id="{F91BBCBE-BD1A-4A5C-B978-06555A07AD40}"/>
+                <a16:creationId xmlns:a16="http://schemas.microsoft.com/office/drawing/2014/main" id="{CB90E1CB-506B-4425-B795-26B5918BE567}"/>
               </a:ext>
             </a:extLst>
           </p:cNvPr>
@@ -11256,7 +11264,7 @@
           <p:cNvPr id="7" name="">
             <a:extLst xmlns:a="http://schemas.openxmlformats.org/drawingml/2006/main">
               <a:ext uri="{FF2B5EF4-FFF2-40B4-BE49-F238E27FC236}">
-                <a16:creationId xmlns:a16="http://schemas.microsoft.com/office/drawing/2014/main" id="{A6E5C008-3966-4F96-8291-F9FE90818F14}"/>
+                <a16:creationId xmlns:a16="http://schemas.microsoft.com/office/drawing/2014/main" id="{FE10AE62-F281-4E84-8BE2-FCB9305D3D92}"/>
               </a:ext>
             </a:extLst>
           </p:cNvPr>
@@ -11288,7 +11296,7 @@
           <p:cNvPr id="8" name="">
             <a:extLst xmlns:a="http://schemas.openxmlformats.org/drawingml/2006/main">
               <a:ext uri="{FF2B5EF4-FFF2-40B4-BE49-F238E27FC236}">
-                <a16:creationId xmlns:a16="http://schemas.microsoft.com/office/drawing/2014/main" id="{7C8B3E6E-4BD4-408B-85AB-BFAB423AFA67}"/>
+                <a16:creationId xmlns:a16="http://schemas.microsoft.com/office/drawing/2014/main" id="{72513E4C-8769-4583-B767-70419E13ECE3}"/>
               </a:ext>
             </a:extLst>
           </p:cNvPr>
@@ -11345,7 +11353,7 @@
           <p:cNvPr id="9" name="">
             <a:extLst xmlns:a="http://schemas.openxmlformats.org/drawingml/2006/main">
               <a:ext uri="{FF2B5EF4-FFF2-40B4-BE49-F238E27FC236}">
-                <a16:creationId xmlns:a16="http://schemas.microsoft.com/office/drawing/2014/main" id="{106ADD5D-5D86-42F3-B315-4CD3443F9A6A}"/>
+                <a16:creationId xmlns:a16="http://schemas.microsoft.com/office/drawing/2014/main" id="{F6A9525C-F890-4803-A5F8-97DD6735EC84}"/>
               </a:ext>
             </a:extLst>
           </p:cNvPr>
@@ -11406,7 +11414,7 @@
           <p:nvPr/>
         </p:nvPicPr>
         <p:blipFill>
-          <a:blip xmlns:r="http://schemas.openxmlformats.org/officeDocument/2006/relationships" xmlns:a="http://schemas.openxmlformats.org/drawingml/2006/main" r:embed="R194cf5e274624b5a"/>
+          <a:blip xmlns:r="http://schemas.openxmlformats.org/officeDocument/2006/relationships" xmlns:a="http://schemas.openxmlformats.org/drawingml/2006/main" r:embed="R5ff62b654b5b40d8"/>
           <a:stretch xmlns:a="http://schemas.openxmlformats.org/drawingml/2006/main"/>
         </p:blipFill>
         <p:spPr>
@@ -11424,7 +11432,7 @@
           <p:cNvPr id="11" name="">
             <a:extLst xmlns:a="http://schemas.openxmlformats.org/drawingml/2006/main">
               <a:ext uri="{FF2B5EF4-FFF2-40B4-BE49-F238E27FC236}">
-                <a16:creationId xmlns:a16="http://schemas.microsoft.com/office/drawing/2014/main" id="{CE273978-7E79-4D49-9723-E7D892C1FDFD}"/>
+                <a16:creationId xmlns:a16="http://schemas.microsoft.com/office/drawing/2014/main" id="{48A39C8E-E253-4D98-A70B-096269F6C213}"/>
               </a:ext>
             </a:extLst>
           </p:cNvPr>
@@ -11481,7 +11489,7 @@
           <p:cNvPr id="12" name="">
             <a:extLst xmlns:a="http://schemas.openxmlformats.org/drawingml/2006/main">
               <a:ext uri="{FF2B5EF4-FFF2-40B4-BE49-F238E27FC236}">
-                <a16:creationId xmlns:a16="http://schemas.microsoft.com/office/drawing/2014/main" id="{48BD6E8F-2E35-4CBF-AF71-051C701110AC}"/>
+                <a16:creationId xmlns:a16="http://schemas.microsoft.com/office/drawing/2014/main" id="{A034A1E5-6BCF-461A-B9A3-721EF0190BD6}"/>
               </a:ext>
             </a:extLst>
           </p:cNvPr>
@@ -11538,7 +11546,7 @@
           <p:cNvPr id="13" name="">
             <a:extLst xmlns:a="http://schemas.openxmlformats.org/drawingml/2006/main">
               <a:ext uri="{FF2B5EF4-FFF2-40B4-BE49-F238E27FC236}">
-                <a16:creationId xmlns:a16="http://schemas.microsoft.com/office/drawing/2014/main" id="{42985AD6-CCE9-4B6F-AB36-98D01BACCD56}"/>
+                <a16:creationId xmlns:a16="http://schemas.microsoft.com/office/drawing/2014/main" id="{5537139C-A910-4515-873B-C0C71ABB0725}"/>
               </a:ext>
             </a:extLst>
           </p:cNvPr>
@@ -11570,7 +11578,7 @@
           <p:cNvPr id="14" name="">
             <a:extLst xmlns:a="http://schemas.openxmlformats.org/drawingml/2006/main">
               <a:ext uri="{FF2B5EF4-FFF2-40B4-BE49-F238E27FC236}">
-                <a16:creationId xmlns:a16="http://schemas.microsoft.com/office/drawing/2014/main" id="{3191E8E8-0EB3-485B-9877-EDA3D4EC3943}"/>
+                <a16:creationId xmlns:a16="http://schemas.microsoft.com/office/drawing/2014/main" id="{3C6ECF97-D05D-4FB8-B88D-CE8FB7E689D6}"/>
               </a:ext>
             </a:extLst>
           </p:cNvPr>
@@ -11627,7 +11635,7 @@
           <p:cNvPr id="15" name="">
             <a:extLst xmlns:a="http://schemas.openxmlformats.org/drawingml/2006/main">
               <a:ext uri="{FF2B5EF4-FFF2-40B4-BE49-F238E27FC236}">
-                <a16:creationId xmlns:a16="http://schemas.microsoft.com/office/drawing/2014/main" id="{3C59475D-C5CF-4876-942B-6B20A513E91F}"/>
+                <a16:creationId xmlns:a16="http://schemas.microsoft.com/office/drawing/2014/main" id="{35FEBA86-DBDE-4A46-ABBA-0861451160A0}"/>
               </a:ext>
             </a:extLst>
           </p:cNvPr>
@@ -11682,7 +11690,7 @@
     </p:spTree>
     <p:extLst>
       <p:ext uri="{BB962C8B-B14F-4D97-AF65-F5344CB8AC3E}">
-        <p14:creationId xmlns:p14="http://schemas.microsoft.com/office/powerpoint/2010/main" val="669523512"/>
+        <p14:creationId xmlns:p14="http://schemas.microsoft.com/office/powerpoint/2010/main" val="55917772"/>
       </p:ext>
     </p:extLst>
   </p:cSld>
@@ -11837,7 +11845,7 @@
           <p:cNvPr id="23" name="">
             <a:extLst xmlns:a="http://schemas.openxmlformats.org/drawingml/2006/main">
               <a:ext uri="{FF2B5EF4-FFF2-40B4-BE49-F238E27FC236}">
-                <a16:creationId xmlns:a16="http://schemas.microsoft.com/office/drawing/2014/main" id="{D652A66A-7E1B-4E38-8EFD-F2A0F80EAD70}"/>
+                <a16:creationId xmlns:a16="http://schemas.microsoft.com/office/drawing/2014/main" id="{1158FAEB-2835-4893-8BB7-8AC7ACD10131}"/>
               </a:ext>
             </a:extLst>
           </p:cNvPr>
@@ -11869,7 +11877,7 @@
           <p:cNvPr id="2" name="">
             <a:extLst xmlns:a="http://schemas.openxmlformats.org/drawingml/2006/main">
               <a:ext uri="{FF2B5EF4-FFF2-40B4-BE49-F238E27FC236}">
-                <a16:creationId xmlns:a16="http://schemas.microsoft.com/office/drawing/2014/main" id="{B06A9A03-008A-4F88-AD25-436F5BB39F3A}"/>
+                <a16:creationId xmlns:a16="http://schemas.microsoft.com/office/drawing/2014/main" id="{9C29DAA4-430D-498E-AB4F-1DA966A9D1AB}"/>
               </a:ext>
             </a:extLst>
           </p:cNvPr>
@@ -11926,7 +11934,7 @@
           <p:cNvPr id="3" name="">
             <a:extLst xmlns:a="http://schemas.openxmlformats.org/drawingml/2006/main">
               <a:ext uri="{FF2B5EF4-FFF2-40B4-BE49-F238E27FC236}">
-                <a16:creationId xmlns:a16="http://schemas.microsoft.com/office/drawing/2014/main" id="{5CFCBDEC-FC18-4E75-B4A5-22AD9F808722}"/>
+                <a16:creationId xmlns:a16="http://schemas.microsoft.com/office/drawing/2014/main" id="{FB3E20CB-9486-4BB9-AC72-0FF4B19D4DFF}"/>
               </a:ext>
             </a:extLst>
           </p:cNvPr>
@@ -11958,7 +11966,7 @@
           <p:cNvPr id="4" name="">
             <a:extLst xmlns:a="http://schemas.openxmlformats.org/drawingml/2006/main">
               <a:ext uri="{FF2B5EF4-FFF2-40B4-BE49-F238E27FC236}">
-                <a16:creationId xmlns:a16="http://schemas.microsoft.com/office/drawing/2014/main" id="{959EC8AF-4137-42BD-A420-62176FE61A10}"/>
+                <a16:creationId xmlns:a16="http://schemas.microsoft.com/office/drawing/2014/main" id="{8435D2C4-DB06-48DF-83AA-F67397B73661}"/>
               </a:ext>
             </a:extLst>
           </p:cNvPr>
@@ -12015,7 +12023,7 @@
           <p:cNvPr id="5" name="">
             <a:extLst xmlns:a="http://schemas.openxmlformats.org/drawingml/2006/main">
               <a:ext uri="{FF2B5EF4-FFF2-40B4-BE49-F238E27FC236}">
-                <a16:creationId xmlns:a16="http://schemas.microsoft.com/office/drawing/2014/main" id="{4B1293EE-FCE0-4568-8633-6899FF83AD8E}"/>
+                <a16:creationId xmlns:a16="http://schemas.microsoft.com/office/drawing/2014/main" id="{A816EB60-8114-4021-9083-1D579964DFD3}"/>
               </a:ext>
             </a:extLst>
           </p:cNvPr>
@@ -12072,7 +12080,7 @@
           <p:cNvPr id="6" name="">
             <a:extLst xmlns:a="http://schemas.openxmlformats.org/drawingml/2006/main">
               <a:ext uri="{FF2B5EF4-FFF2-40B4-BE49-F238E27FC236}">
-                <a16:creationId xmlns:a16="http://schemas.microsoft.com/office/drawing/2014/main" id="{99265016-61D3-436E-BC8D-EAD00469AA0E}"/>
+                <a16:creationId xmlns:a16="http://schemas.microsoft.com/office/drawing/2014/main" id="{D321A10C-25A3-4EA4-9A5C-C024417C2595}"/>
               </a:ext>
             </a:extLst>
           </p:cNvPr>
@@ -12129,7 +12137,7 @@
           <p:cNvPr id="7" name="">
             <a:extLst xmlns:a="http://schemas.openxmlformats.org/drawingml/2006/main">
               <a:ext uri="{FF2B5EF4-FFF2-40B4-BE49-F238E27FC236}">
-                <a16:creationId xmlns:a16="http://schemas.microsoft.com/office/drawing/2014/main" id="{2A409268-49FB-4D6C-81DB-42185428F205}"/>
+                <a16:creationId xmlns:a16="http://schemas.microsoft.com/office/drawing/2014/main" id="{FD579A6E-D5E3-4DDC-9C12-463601A22523}"/>
               </a:ext>
             </a:extLst>
           </p:cNvPr>
@@ -12161,7 +12169,7 @@
           <p:cNvPr id="8" name="">
             <a:extLst xmlns:a="http://schemas.openxmlformats.org/drawingml/2006/main">
               <a:ext uri="{FF2B5EF4-FFF2-40B4-BE49-F238E27FC236}">
-                <a16:creationId xmlns:a16="http://schemas.microsoft.com/office/drawing/2014/main" id="{801D9547-6084-43CE-B95B-24E66042F6C5}"/>
+                <a16:creationId xmlns:a16="http://schemas.microsoft.com/office/drawing/2014/main" id="{6A114FE7-9FE9-4FCD-99A0-3C96264BBD4E}"/>
               </a:ext>
             </a:extLst>
           </p:cNvPr>
@@ -12218,7 +12226,7 @@
           <p:cNvPr id="9" name="">
             <a:extLst xmlns:a="http://schemas.openxmlformats.org/drawingml/2006/main">
               <a:ext uri="{FF2B5EF4-FFF2-40B4-BE49-F238E27FC236}">
-                <a16:creationId xmlns:a16="http://schemas.microsoft.com/office/drawing/2014/main" id="{945F4B69-FD6C-470E-9C6C-3B58EE3572AD}"/>
+                <a16:creationId xmlns:a16="http://schemas.microsoft.com/office/drawing/2014/main" id="{2D05C8C5-CDF2-4B50-A4E4-1EE9D62C9949}"/>
               </a:ext>
             </a:extLst>
           </p:cNvPr>
@@ -12275,7 +12283,7 @@
           <p:cNvPr id="10" name="">
             <a:extLst xmlns:a="http://schemas.openxmlformats.org/drawingml/2006/main">
               <a:ext uri="{FF2B5EF4-FFF2-40B4-BE49-F238E27FC236}">
-                <a16:creationId xmlns:a16="http://schemas.microsoft.com/office/drawing/2014/main" id="{CC62EB4C-590E-4D54-BAFD-89BA12C4B2CC}"/>
+                <a16:creationId xmlns:a16="http://schemas.microsoft.com/office/drawing/2014/main" id="{6B9AD181-7F63-4C68-A451-A9F3CFEFD976}"/>
               </a:ext>
             </a:extLst>
           </p:cNvPr>
@@ -12309,7 +12317,7 @@
           <p:cNvPr id="11" name="">
             <a:extLst xmlns:a="http://schemas.openxmlformats.org/drawingml/2006/main">
               <a:ext uri="{FF2B5EF4-FFF2-40B4-BE49-F238E27FC236}">
-                <a16:creationId xmlns:a16="http://schemas.microsoft.com/office/drawing/2014/main" id="{81C8EB00-C596-4A4D-8878-566317408877}"/>
+                <a16:creationId xmlns:a16="http://schemas.microsoft.com/office/drawing/2014/main" id="{413FA79F-BB55-41B1-8679-AACC964F2CFB}"/>
               </a:ext>
             </a:extLst>
           </p:cNvPr>
@@ -12341,7 +12349,7 @@
           <p:cNvPr id="12" name="">
             <a:extLst xmlns:a="http://schemas.openxmlformats.org/drawingml/2006/main">
               <a:ext uri="{FF2B5EF4-FFF2-40B4-BE49-F238E27FC236}">
-                <a16:creationId xmlns:a16="http://schemas.microsoft.com/office/drawing/2014/main" id="{01E0E605-F529-4F15-B2D5-7B3A34028E6A}"/>
+                <a16:creationId xmlns:a16="http://schemas.microsoft.com/office/drawing/2014/main" id="{9367F869-ABF7-4811-9D8F-2948ED2FF9CF}"/>
               </a:ext>
             </a:extLst>
           </p:cNvPr>
@@ -12398,7 +12406,7 @@
           <p:cNvPr id="13" name="">
             <a:extLst xmlns:a="http://schemas.openxmlformats.org/drawingml/2006/main">
               <a:ext uri="{FF2B5EF4-FFF2-40B4-BE49-F238E27FC236}">
-                <a16:creationId xmlns:a16="http://schemas.microsoft.com/office/drawing/2014/main" id="{5FA4D50C-9D8A-4C8E-85CC-D8EF0601FD7F}"/>
+                <a16:creationId xmlns:a16="http://schemas.microsoft.com/office/drawing/2014/main" id="{77F98699-4437-4A4C-9511-8001A8EFB7AF}"/>
               </a:ext>
             </a:extLst>
           </p:cNvPr>
@@ -12455,7 +12463,7 @@
           <p:cNvPr id="14" name="">
             <a:extLst xmlns:a="http://schemas.openxmlformats.org/drawingml/2006/main">
               <a:ext uri="{FF2B5EF4-FFF2-40B4-BE49-F238E27FC236}">
-                <a16:creationId xmlns:a16="http://schemas.microsoft.com/office/drawing/2014/main" id="{A89CF175-7834-44E2-842F-7765B1752307}"/>
+                <a16:creationId xmlns:a16="http://schemas.microsoft.com/office/drawing/2014/main" id="{700183AD-195B-412D-952C-EB6C606DE75B}"/>
               </a:ext>
             </a:extLst>
           </p:cNvPr>
@@ -12489,7 +12497,7 @@
           <p:cNvPr id="15" name="">
             <a:extLst xmlns:a="http://schemas.openxmlformats.org/drawingml/2006/main">
               <a:ext uri="{FF2B5EF4-FFF2-40B4-BE49-F238E27FC236}">
-                <a16:creationId xmlns:a16="http://schemas.microsoft.com/office/drawing/2014/main" id="{15DDBF2E-D171-4EB1-B984-03BFA16B4423}"/>
+                <a16:creationId xmlns:a16="http://schemas.microsoft.com/office/drawing/2014/main" id="{C5E1044C-4BC5-4BE3-8ED5-8B9A9736A851}"/>
               </a:ext>
             </a:extLst>
           </p:cNvPr>
@@ -12521,7 +12529,7 @@
           <p:cNvPr id="16" name="">
             <a:extLst xmlns:a="http://schemas.openxmlformats.org/drawingml/2006/main">
               <a:ext uri="{FF2B5EF4-FFF2-40B4-BE49-F238E27FC236}">
-                <a16:creationId xmlns:a16="http://schemas.microsoft.com/office/drawing/2014/main" id="{C531D488-5F8E-4502-A527-C7A18C6CF289}"/>
+                <a16:creationId xmlns:a16="http://schemas.microsoft.com/office/drawing/2014/main" id="{F6A98E20-BF60-4604-967D-F83C10E8AC80}"/>
               </a:ext>
             </a:extLst>
           </p:cNvPr>
@@ -12578,7 +12586,7 @@
           <p:cNvPr id="17" name="">
             <a:extLst xmlns:a="http://schemas.openxmlformats.org/drawingml/2006/main">
               <a:ext uri="{FF2B5EF4-FFF2-40B4-BE49-F238E27FC236}">
-                <a16:creationId xmlns:a16="http://schemas.microsoft.com/office/drawing/2014/main" id="{456342FB-3F21-4578-9AD2-7EB749B5C761}"/>
+                <a16:creationId xmlns:a16="http://schemas.microsoft.com/office/drawing/2014/main" id="{B8A097A5-4B89-4787-942E-B6A81682662E}"/>
               </a:ext>
             </a:extLst>
           </p:cNvPr>
@@ -12635,7 +12643,7 @@
           <p:cNvPr id="18" name="">
             <a:extLst xmlns:a="http://schemas.openxmlformats.org/drawingml/2006/main">
               <a:ext uri="{FF2B5EF4-FFF2-40B4-BE49-F238E27FC236}">
-                <a16:creationId xmlns:a16="http://schemas.microsoft.com/office/drawing/2014/main" id="{7F3E7855-5220-40EA-A63B-0879C1EC0171}"/>
+                <a16:creationId xmlns:a16="http://schemas.microsoft.com/office/drawing/2014/main" id="{4DF72BC2-9497-4D88-97F2-33EA44659928}"/>
               </a:ext>
             </a:extLst>
           </p:cNvPr>
@@ -12669,7 +12677,7 @@
           <p:cNvPr id="19" name="">
             <a:extLst xmlns:a="http://schemas.openxmlformats.org/drawingml/2006/main">
               <a:ext uri="{FF2B5EF4-FFF2-40B4-BE49-F238E27FC236}">
-                <a16:creationId xmlns:a16="http://schemas.microsoft.com/office/drawing/2014/main" id="{A793C9DE-B9B5-4286-B7BE-66BB515A0712}"/>
+                <a16:creationId xmlns:a16="http://schemas.microsoft.com/office/drawing/2014/main" id="{E61DDE84-70D2-44FC-91D4-E42D482A1F40}"/>
               </a:ext>
             </a:extLst>
           </p:cNvPr>
@@ -12701,7 +12709,7 @@
           <p:cNvPr id="20" name="">
             <a:extLst xmlns:a="http://schemas.openxmlformats.org/drawingml/2006/main">
               <a:ext uri="{FF2B5EF4-FFF2-40B4-BE49-F238E27FC236}">
-                <a16:creationId xmlns:a16="http://schemas.microsoft.com/office/drawing/2014/main" id="{B0BED465-A5DF-4A8C-A055-36C3FB898BFC}"/>
+                <a16:creationId xmlns:a16="http://schemas.microsoft.com/office/drawing/2014/main" id="{CDCB8159-48E0-47B6-AC8B-84C20DB07CD4}"/>
               </a:ext>
             </a:extLst>
           </p:cNvPr>
@@ -12758,7 +12766,7 @@
           <p:cNvPr id="21" name="">
             <a:extLst xmlns:a="http://schemas.openxmlformats.org/drawingml/2006/main">
               <a:ext uri="{FF2B5EF4-FFF2-40B4-BE49-F238E27FC236}">
-                <a16:creationId xmlns:a16="http://schemas.microsoft.com/office/drawing/2014/main" id="{2915FEDE-C954-4C6C-A4BC-5F27EE014E24}"/>
+                <a16:creationId xmlns:a16="http://schemas.microsoft.com/office/drawing/2014/main" id="{28D74908-7DD6-4ECA-9AA5-83B43ADB1DFC}"/>
               </a:ext>
             </a:extLst>
           </p:cNvPr>
@@ -12815,7 +12823,7 @@
           <p:cNvPr id="22" name="">
             <a:extLst xmlns:a="http://schemas.openxmlformats.org/drawingml/2006/main">
               <a:ext uri="{FF2B5EF4-FFF2-40B4-BE49-F238E27FC236}">
-                <a16:creationId xmlns:a16="http://schemas.microsoft.com/office/drawing/2014/main" id="{9B264812-35A6-47A6-9751-D5CAFFADD3DE}"/>
+                <a16:creationId xmlns:a16="http://schemas.microsoft.com/office/drawing/2014/main" id="{5CFB4FED-85B4-4865-BFA0-63565AD17B49}"/>
               </a:ext>
             </a:extLst>
           </p:cNvPr>
@@ -12870,7 +12878,7 @@
     </p:spTree>
     <p:extLst>
       <p:ext uri="{BB962C8B-B14F-4D97-AF65-F5344CB8AC3E}">
-        <p14:creationId xmlns:p14="http://schemas.microsoft.com/office/powerpoint/2010/main" val="1157989336"/>
+        <p14:creationId xmlns:p14="http://schemas.microsoft.com/office/powerpoint/2010/main" val="115809616"/>
       </p:ext>
     </p:extLst>
   </p:cSld>
@@ -13071,7 +13079,7 @@
           <p:cNvPr id="22" name="">
             <a:extLst xmlns:a="http://schemas.openxmlformats.org/drawingml/2006/main">
               <a:ext uri="{FF2B5EF4-FFF2-40B4-BE49-F238E27FC236}">
-                <a16:creationId xmlns:a16="http://schemas.microsoft.com/office/drawing/2014/main" id="{980B2AAA-DC8B-406F-9125-7779833D03BB}"/>
+                <a16:creationId xmlns:a16="http://schemas.microsoft.com/office/drawing/2014/main" id="{83E04850-BA85-40F8-82A4-EFE5E2A8B36D}"/>
               </a:ext>
             </a:extLst>
           </p:cNvPr>
@@ -13103,7 +13111,7 @@
           <p:cNvPr id="2" name="">
             <a:extLst xmlns:a="http://schemas.openxmlformats.org/drawingml/2006/main">
               <a:ext uri="{FF2B5EF4-FFF2-40B4-BE49-F238E27FC236}">
-                <a16:creationId xmlns:a16="http://schemas.microsoft.com/office/drawing/2014/main" id="{CA16B8B2-9F76-46A1-8A3E-536C42E6A333}"/>
+                <a16:creationId xmlns:a16="http://schemas.microsoft.com/office/drawing/2014/main" id="{3CBC0874-2389-4889-877E-49916BB3FA31}"/>
               </a:ext>
             </a:extLst>
           </p:cNvPr>
@@ -13160,7 +13168,7 @@
           <p:cNvPr id="3" name="">
             <a:extLst xmlns:a="http://schemas.openxmlformats.org/drawingml/2006/main">
               <a:ext uri="{FF2B5EF4-FFF2-40B4-BE49-F238E27FC236}">
-                <a16:creationId xmlns:a16="http://schemas.microsoft.com/office/drawing/2014/main" id="{9F613B1B-F8C6-428C-8E4A-5CF951128E3D}"/>
+                <a16:creationId xmlns:a16="http://schemas.microsoft.com/office/drawing/2014/main" id="{88F4E07A-DB63-4F93-8813-D5A6BB0F232C}"/>
               </a:ext>
             </a:extLst>
           </p:cNvPr>
@@ -13192,7 +13200,7 @@
           <p:cNvPr id="4" name="">
             <a:extLst xmlns:a="http://schemas.openxmlformats.org/drawingml/2006/main">
               <a:ext uri="{FF2B5EF4-FFF2-40B4-BE49-F238E27FC236}">
-                <a16:creationId xmlns:a16="http://schemas.microsoft.com/office/drawing/2014/main" id="{E82A8735-38EE-4233-9B8F-2979A686FB20}"/>
+                <a16:creationId xmlns:a16="http://schemas.microsoft.com/office/drawing/2014/main" id="{4D203FB1-BED4-40E9-8BBC-59CFD5CFEBDA}"/>
               </a:ext>
             </a:extLst>
           </p:cNvPr>
@@ -13249,7 +13257,7 @@
           <p:cNvPr id="5" name="">
             <a:extLst xmlns:a="http://schemas.openxmlformats.org/drawingml/2006/main">
               <a:ext uri="{FF2B5EF4-FFF2-40B4-BE49-F238E27FC236}">
-                <a16:creationId xmlns:a16="http://schemas.microsoft.com/office/drawing/2014/main" id="{3568A164-9BD7-4236-9903-D27AAE57555E}"/>
+                <a16:creationId xmlns:a16="http://schemas.microsoft.com/office/drawing/2014/main" id="{00FEC580-B08B-44FA-82B3-F2D5C84275FA}"/>
               </a:ext>
             </a:extLst>
           </p:cNvPr>
@@ -13306,7 +13314,7 @@
           <p:cNvPr id="6" name="">
             <a:extLst xmlns:a="http://schemas.openxmlformats.org/drawingml/2006/main">
               <a:ext uri="{FF2B5EF4-FFF2-40B4-BE49-F238E27FC236}">
-                <a16:creationId xmlns:a16="http://schemas.microsoft.com/office/drawing/2014/main" id="{42711BB0-54FF-4416-93DE-2CF99E5E21BF}"/>
+                <a16:creationId xmlns:a16="http://schemas.microsoft.com/office/drawing/2014/main" id="{AFA4A080-AF77-4C02-8914-6CEB3E6BDA68}"/>
               </a:ext>
             </a:extLst>
           </p:cNvPr>
@@ -13363,7 +13371,7 @@
           <p:cNvPr id="7" name="">
             <a:extLst xmlns:a="http://schemas.openxmlformats.org/drawingml/2006/main">
               <a:ext uri="{FF2B5EF4-FFF2-40B4-BE49-F238E27FC236}">
-                <a16:creationId xmlns:a16="http://schemas.microsoft.com/office/drawing/2014/main" id="{E7B0AC11-68D4-434E-A682-07AF1D0C299C}"/>
+                <a16:creationId xmlns:a16="http://schemas.microsoft.com/office/drawing/2014/main" id="{A1CF3F02-8E92-4C3E-B14D-8687153D79FE}"/>
               </a:ext>
             </a:extLst>
           </p:cNvPr>
@@ -13395,7 +13403,7 @@
           <p:cNvPr id="8" name="">
             <a:extLst xmlns:a="http://schemas.openxmlformats.org/drawingml/2006/main">
               <a:ext uri="{FF2B5EF4-FFF2-40B4-BE49-F238E27FC236}">
-                <a16:creationId xmlns:a16="http://schemas.microsoft.com/office/drawing/2014/main" id="{32A563B0-9872-4454-B47C-E4CD78829600}"/>
+                <a16:creationId xmlns:a16="http://schemas.microsoft.com/office/drawing/2014/main" id="{7427BCC2-9082-43E8-B1B8-C96059AC88AA}"/>
               </a:ext>
             </a:extLst>
           </p:cNvPr>
@@ -13452,7 +13460,7 @@
           <p:cNvPr id="9" name="">
             <a:extLst xmlns:a="http://schemas.openxmlformats.org/drawingml/2006/main">
               <a:ext uri="{FF2B5EF4-FFF2-40B4-BE49-F238E27FC236}">
-                <a16:creationId xmlns:a16="http://schemas.microsoft.com/office/drawing/2014/main" id="{02FF0B43-7BBE-439A-85F2-80A969277BE8}"/>
+                <a16:creationId xmlns:a16="http://schemas.microsoft.com/office/drawing/2014/main" id="{F0979400-5F79-4970-A88D-EF2573B5F267}"/>
               </a:ext>
             </a:extLst>
           </p:cNvPr>
@@ -13509,7 +13517,7 @@
           <p:cNvPr id="10" name="">
             <a:extLst xmlns:a="http://schemas.openxmlformats.org/drawingml/2006/main">
               <a:ext uri="{FF2B5EF4-FFF2-40B4-BE49-F238E27FC236}">
-                <a16:creationId xmlns:a16="http://schemas.microsoft.com/office/drawing/2014/main" id="{6E53B162-F68D-4F23-9215-EABB557152BA}"/>
+                <a16:creationId xmlns:a16="http://schemas.microsoft.com/office/drawing/2014/main" id="{86D01CE8-F7B8-4245-B095-44207C5A5A59}"/>
               </a:ext>
             </a:extLst>
           </p:cNvPr>
@@ -13543,7 +13551,7 @@
           <p:cNvPr id="11" name="">
             <a:extLst xmlns:a="http://schemas.openxmlformats.org/drawingml/2006/main">
               <a:ext uri="{FF2B5EF4-FFF2-40B4-BE49-F238E27FC236}">
-                <a16:creationId xmlns:a16="http://schemas.microsoft.com/office/drawing/2014/main" id="{C678DF0C-3240-49F6-AEE1-91EA05F02383}"/>
+                <a16:creationId xmlns:a16="http://schemas.microsoft.com/office/drawing/2014/main" id="{75F724B8-5E29-41D0-833E-9C829DE2E9B4}"/>
               </a:ext>
             </a:extLst>
           </p:cNvPr>
@@ -13575,7 +13583,7 @@
           <p:cNvPr id="12" name="">
             <a:extLst xmlns:a="http://schemas.openxmlformats.org/drawingml/2006/main">
               <a:ext uri="{FF2B5EF4-FFF2-40B4-BE49-F238E27FC236}">
-                <a16:creationId xmlns:a16="http://schemas.microsoft.com/office/drawing/2014/main" id="{59B9E17D-DDE4-4295-B006-F980ED47369A}"/>
+                <a16:creationId xmlns:a16="http://schemas.microsoft.com/office/drawing/2014/main" id="{E75F6983-B406-4A43-A32C-BA6F8FC9728E}"/>
               </a:ext>
             </a:extLst>
           </p:cNvPr>
@@ -13632,7 +13640,7 @@
           <p:cNvPr id="13" name="">
             <a:extLst xmlns:a="http://schemas.openxmlformats.org/drawingml/2006/main">
               <a:ext uri="{FF2B5EF4-FFF2-40B4-BE49-F238E27FC236}">
-                <a16:creationId xmlns:a16="http://schemas.microsoft.com/office/drawing/2014/main" id="{676F2F90-24D7-440F-A561-6D06045D51DF}"/>
+                <a16:creationId xmlns:a16="http://schemas.microsoft.com/office/drawing/2014/main" id="{46DD55B9-36BB-4168-8815-828B6E8846D9}"/>
               </a:ext>
             </a:extLst>
           </p:cNvPr>
@@ -13689,7 +13697,7 @@
           <p:cNvPr id="14" name="">
             <a:extLst xmlns:a="http://schemas.openxmlformats.org/drawingml/2006/main">
               <a:ext uri="{FF2B5EF4-FFF2-40B4-BE49-F238E27FC236}">
-                <a16:creationId xmlns:a16="http://schemas.microsoft.com/office/drawing/2014/main" id="{39F39F25-AF14-4B76-BD81-1C774B3702C2}"/>
+                <a16:creationId xmlns:a16="http://schemas.microsoft.com/office/drawing/2014/main" id="{B87E598D-5294-4CED-B68C-432277ED217A}"/>
               </a:ext>
             </a:extLst>
           </p:cNvPr>
@@ -13723,7 +13731,7 @@
           <p:cNvPr id="15" name="">
             <a:extLst xmlns:a="http://schemas.openxmlformats.org/drawingml/2006/main">
               <a:ext uri="{FF2B5EF4-FFF2-40B4-BE49-F238E27FC236}">
-                <a16:creationId xmlns:a16="http://schemas.microsoft.com/office/drawing/2014/main" id="{69FCC199-AA11-4F40-8721-2705F7A7E848}"/>
+                <a16:creationId xmlns:a16="http://schemas.microsoft.com/office/drawing/2014/main" id="{EA9979FC-0ABB-4968-A9D0-9FB434697BEA}"/>
               </a:ext>
             </a:extLst>
           </p:cNvPr>
@@ -13755,7 +13763,7 @@
           <p:cNvPr id="16" name="">
             <a:extLst xmlns:a="http://schemas.openxmlformats.org/drawingml/2006/main">
               <a:ext uri="{FF2B5EF4-FFF2-40B4-BE49-F238E27FC236}">
-                <a16:creationId xmlns:a16="http://schemas.microsoft.com/office/drawing/2014/main" id="{14EC2787-CA62-4792-B46E-4C187D59DFDC}"/>
+                <a16:creationId xmlns:a16="http://schemas.microsoft.com/office/drawing/2014/main" id="{D3DEE727-173C-4F59-98F2-AC9E48F83DC6}"/>
               </a:ext>
             </a:extLst>
           </p:cNvPr>
@@ -13812,7 +13820,7 @@
           <p:cNvPr id="17" name="">
             <a:extLst xmlns:a="http://schemas.openxmlformats.org/drawingml/2006/main">
               <a:ext uri="{FF2B5EF4-FFF2-40B4-BE49-F238E27FC236}">
-                <a16:creationId xmlns:a16="http://schemas.microsoft.com/office/drawing/2014/main" id="{128112B3-189F-4BA1-9AC7-E7916100105E}"/>
+                <a16:creationId xmlns:a16="http://schemas.microsoft.com/office/drawing/2014/main" id="{DE043590-EBDA-439A-AB37-45B0CC86CEFE}"/>
               </a:ext>
             </a:extLst>
           </p:cNvPr>
@@ -13869,7 +13877,7 @@
           <p:cNvPr id="18" name="">
             <a:extLst xmlns:a="http://schemas.openxmlformats.org/drawingml/2006/main">
               <a:ext uri="{FF2B5EF4-FFF2-40B4-BE49-F238E27FC236}">
-                <a16:creationId xmlns:a16="http://schemas.microsoft.com/office/drawing/2014/main" id="{24B8EE86-3F2D-41F8-BE3D-F8E60C3D4447}"/>
+                <a16:creationId xmlns:a16="http://schemas.microsoft.com/office/drawing/2014/main" id="{140868B5-DD59-4661-9835-C5F4E9175520}"/>
               </a:ext>
             </a:extLst>
           </p:cNvPr>
@@ -13903,7 +13911,7 @@
           <p:cNvPr id="19" name="">
             <a:extLst xmlns:a="http://schemas.openxmlformats.org/drawingml/2006/main">
               <a:ext uri="{FF2B5EF4-FFF2-40B4-BE49-F238E27FC236}">
-                <a16:creationId xmlns:a16="http://schemas.microsoft.com/office/drawing/2014/main" id="{FF2730AF-E132-438B-A9B3-C18418CF222C}"/>
+                <a16:creationId xmlns:a16="http://schemas.microsoft.com/office/drawing/2014/main" id="{CE3F9BCE-DB70-44F7-8F86-A3D47611BEC9}"/>
               </a:ext>
             </a:extLst>
           </p:cNvPr>
@@ -13935,7 +13943,7 @@
           <p:cNvPr id="20" name="">
             <a:extLst xmlns:a="http://schemas.openxmlformats.org/drawingml/2006/main">
               <a:ext uri="{FF2B5EF4-FFF2-40B4-BE49-F238E27FC236}">
-                <a16:creationId xmlns:a16="http://schemas.microsoft.com/office/drawing/2014/main" id="{582286D7-EB9F-41E9-BED9-0FC3DD8AE3F3}"/>
+                <a16:creationId xmlns:a16="http://schemas.microsoft.com/office/drawing/2014/main" id="{0236E70E-1FB0-4049-92AA-421C56200A67}"/>
               </a:ext>
             </a:extLst>
           </p:cNvPr>
@@ -13992,7 +14000,7 @@
           <p:cNvPr id="21" name="">
             <a:extLst xmlns:a="http://schemas.openxmlformats.org/drawingml/2006/main">
               <a:ext uri="{FF2B5EF4-FFF2-40B4-BE49-F238E27FC236}">
-                <a16:creationId xmlns:a16="http://schemas.microsoft.com/office/drawing/2014/main" id="{B6D4BEAF-82B2-476D-9A83-B40500D81D71}"/>
+                <a16:creationId xmlns:a16="http://schemas.microsoft.com/office/drawing/2014/main" id="{FFB7D2AC-6E5A-45CF-88DD-27935F81E6CF}"/>
               </a:ext>
             </a:extLst>
           </p:cNvPr>
@@ -14047,7 +14055,7 @@
     </p:spTree>
     <p:extLst>
       <p:ext uri="{BB962C8B-B14F-4D97-AF65-F5344CB8AC3E}">
-        <p14:creationId xmlns:p14="http://schemas.microsoft.com/office/powerpoint/2010/main" val="51712451"/>
+        <p14:creationId xmlns:p14="http://schemas.microsoft.com/office/powerpoint/2010/main" val="1635034312"/>
       </p:ext>
     </p:extLst>
   </p:cSld>
